--- a/presentation.pptx
+++ b/presentation.pptx
@@ -4838,7 +4838,7 @@
           </a:bodyPr>
           <a:lstStyle xmlns:a="http://schemas.openxmlformats.org/drawingml/2006/main"/>
           <a:p xmlns:a="http://schemas.openxmlformats.org/drawingml/2006/main">
-            <a:pPr algn="l">
+            <a:pPr algn="l" marL="0" indent="0">
               <a:lnSpc>
                 <a:spcPct val="112000"/>
               </a:lnSpc>
@@ -4871,7 +4871,7 @@
             </a:r>
           </a:p>
           <a:p xmlns:a="http://schemas.openxmlformats.org/drawingml/2006/main">
-            <a:pPr algn="l">
+            <a:pPr algn="l" marL="0" indent="0">
               <a:lnSpc>
                 <a:spcPct val="112000"/>
               </a:lnSpc>
@@ -4937,7 +4937,7 @@
           </a:bodyPr>
           <a:lstStyle xmlns:a="http://schemas.openxmlformats.org/drawingml/2006/main"/>
           <a:p xmlns:a="http://schemas.openxmlformats.org/drawingml/2006/main">
-            <a:pPr algn="l">
+            <a:pPr algn="l" marL="0" indent="0">
               <a:lnSpc>
                 <a:spcPct val="112000"/>
               </a:lnSpc>
@@ -4970,7 +4970,7 @@
             </a:r>
           </a:p>
           <a:p xmlns:a="http://schemas.openxmlformats.org/drawingml/2006/main">
-            <a:pPr algn="l">
+            <a:pPr algn="l" marL="0" indent="0">
               <a:lnSpc>
                 <a:spcPct val="112000"/>
               </a:lnSpc>
@@ -5003,7 +5003,7 @@
             </a:r>
           </a:p>
           <a:p xmlns:a="http://schemas.openxmlformats.org/drawingml/2006/main">
-            <a:pPr algn="l">
+            <a:pPr algn="l" marL="0" indent="0">
               <a:lnSpc>
                 <a:spcPct val="112000"/>
               </a:lnSpc>
@@ -5032,7 +5032,7 @@
                 <a:ea typeface="Roboto"/>
                 <a:cs typeface="Roboto"/>
               </a:rPr>
-              <a:t>Выбранный портфель №10 · расчёт 12.09.2026</a:t>
+              <a:t>Портфель №10</a:t>
             </a:r>
           </a:p>
         </p:txBody>
@@ -5230,7 +5230,7 @@
             </a:lvl9pPr>
           </a:lstStyle>
           <a:p xmlns:a="http://schemas.openxmlformats.org/drawingml/2006/main">
-            <a:pPr algn="l">
+            <a:pPr algn="l" marL="0" indent="0">
               <a:lnSpc>
                 <a:spcPct val="112000"/>
               </a:lnSpc>
@@ -5456,7 +5456,7 @@
             </a:lvl9pPr>
           </a:lstStyle>
           <a:p xmlns:a="http://schemas.openxmlformats.org/drawingml/2006/main">
-            <a:pPr algn="l">
+            <a:pPr algn="l" marL="0" indent="0">
               <a:lnSpc>
                 <a:spcPct val="112000"/>
               </a:lnSpc>
@@ -5527,6 +5527,12 @@
             <a:schemeClr val="tx1"/>
           </a:fontRef>
         </p:style>
+        <p:txBody xmlns:a="http://schemas.openxmlformats.org/drawingml/2006/main">
+          <a:bodyPr/>
+          <a:p>
+            <a:pPr marL="0" indent="0"/>
+          </a:p>
+        </p:txBody>
       </p:sp>
       <p:sp>
         <p:nvSpPr>
@@ -5561,7 +5567,7 @@
           </a:bodyPr>
           <a:lstStyle xmlns:a="http://schemas.openxmlformats.org/drawingml/2006/main"/>
           <a:p xmlns:a="http://schemas.openxmlformats.org/drawingml/2006/main">
-            <a:pPr algn="l">
+            <a:pPr algn="l" marL="0" indent="0">
               <a:lnSpc>
                 <a:spcPct val="112000"/>
               </a:lnSpc>
@@ -5628,7 +5634,7 @@
           </a:bodyPr>
           <a:lstStyle xmlns:a="http://schemas.openxmlformats.org/drawingml/2006/main"/>
           <a:p xmlns:a="http://schemas.openxmlformats.org/drawingml/2006/main">
-            <a:pPr algn="l">
+            <a:pPr algn="l" marL="0" indent="0">
               <a:lnSpc>
                 <a:spcPct val="112000"/>
               </a:lnSpc>
@@ -5695,7 +5701,7 @@
           </a:bodyPr>
           <a:lstStyle xmlns:a="http://schemas.openxmlformats.org/drawingml/2006/main"/>
           <a:p xmlns:a="http://schemas.openxmlformats.org/drawingml/2006/main">
-            <a:pPr algn="l">
+            <a:pPr algn="l" marL="0" indent="0">
               <a:lnSpc>
                 <a:spcPct val="112000"/>
               </a:lnSpc>
@@ -5724,7 +5730,41 @@
                 <a:ea typeface="Roboto"/>
                 <a:cs typeface="Roboto"/>
               </a:rPr>
-              <a:t>Результат актуальной ЗАПИСКА.md · исходные данные кейса и допущения команды</a:t>
+              <a:t>Полный расчёт и обоснование — ЗАПИСКА.md</a:t>
+            </a:r>
+          </a:p>
+        </p:txBody>
+      </p:sp>
+      <p:sp xmlns:a="http://schemas.openxmlformats.org/drawingml/2006/main">
+        <p:nvSpPr>
+          <p:cNvPr id="14" name="TextBox 13"/>
+          <p:cNvSpPr txBox="1"/>
+          <p:nvPr/>
+        </p:nvSpPr>
+        <p:spPr>
+          <a:xfrm>
+            <a:off x="603504" y="3474720"/>
+            <a:ext cx="8229600" cy="384048"/>
+          </a:xfrm>
+          <a:prstGeom prst="rect">
+            <a:avLst/>
+          </a:prstGeom>
+          <a:noFill/>
+        </p:spPr>
+        <p:txBody>
+          <a:bodyPr wrap="square" lIns="0" tIns="0" bIns="0">
+            <a:spAutoFit/>
+          </a:bodyPr>
+          <a:lstStyle/>
+          <a:p>
+            <a:r>
+              <a:rPr sz="1650" b="0">
+                <a:solidFill>
+                  <a:srgbClr val="17212F"/>
+                </a:solidFill>
+                <a:latin typeface="Lora Medium"/>
+              </a:rPr>
+              <a:t>Михаил Урусов  ·  Тимофей Ильин  ·  Егор Сапрунов</a:t>
             </a:r>
           </a:p>
         </p:txBody>
@@ -5782,7 +5822,7 @@
           </a:bodyPr>
           <a:lstStyle xmlns:a="http://schemas.openxmlformats.org/drawingml/2006/main"/>
           <a:p xmlns:a="http://schemas.openxmlformats.org/drawingml/2006/main">
-            <a:pPr algn="r">
+            <a:pPr algn="r" marL="0" indent="0">
               <a:lnSpc>
                 <a:spcPct val="112000"/>
               </a:lnSpc>
@@ -5867,7 +5907,7 @@
           <a:bodyPr xmlns:a="http://schemas.openxmlformats.org/drawingml/2006/main" anchor="ctr"/>
           <a:lstStyle xmlns:a="http://schemas.openxmlformats.org/drawingml/2006/main"/>
           <a:p xmlns:a="http://schemas.openxmlformats.org/drawingml/2006/main">
-            <a:pPr algn="ctr">
+            <a:pPr algn="l" marL="0" indent="0">
               <a:buNone/>
             </a:pPr>
             <a:endParaRPr>
@@ -5929,7 +5969,7 @@
           <a:bodyPr xmlns:a="http://schemas.openxmlformats.org/drawingml/2006/main" anchor="ctr"/>
           <a:lstStyle xmlns:a="http://schemas.openxmlformats.org/drawingml/2006/main"/>
           <a:p xmlns:a="http://schemas.openxmlformats.org/drawingml/2006/main">
-            <a:pPr algn="ctr">
+            <a:pPr algn="l" marL="0" indent="0">
               <a:buNone/>
             </a:pPr>
             <a:endParaRPr>
@@ -6132,7 +6172,7 @@
             </a:lvl9pPr>
           </a:lstStyle>
           <a:p xmlns:a="http://schemas.openxmlformats.org/drawingml/2006/main">
-            <a:pPr algn="l">
+            <a:pPr algn="l" marL="0" indent="0">
               <a:lnSpc>
                 <a:spcPct val="112000"/>
               </a:lnSpc>
@@ -6165,7 +6205,7 @@
             </a:r>
           </a:p>
           <a:p xmlns:a="http://schemas.openxmlformats.org/drawingml/2006/main">
-            <a:pPr algn="l">
+            <a:pPr algn="l" marL="0" indent="0">
               <a:lnSpc>
                 <a:spcPct val="112000"/>
               </a:lnSpc>
@@ -6198,7 +6238,7 @@
             </a:r>
           </a:p>
           <a:p xmlns:a="http://schemas.openxmlformats.org/drawingml/2006/main">
-            <a:pPr algn="l">
+            <a:pPr algn="l" marL="0" indent="0">
               <a:lnSpc>
                 <a:spcPct val="112000"/>
               </a:lnSpc>
@@ -6231,7 +6271,7 @@
             </a:r>
           </a:p>
           <a:p xmlns:a="http://schemas.openxmlformats.org/drawingml/2006/main">
-            <a:pPr algn="l">
+            <a:pPr algn="l" marL="0" indent="0">
               <a:lnSpc>
                 <a:spcPct val="112000"/>
               </a:lnSpc>
@@ -6457,7 +6497,7 @@
             </a:lvl9pPr>
           </a:lstStyle>
           <a:p xmlns:a="http://schemas.openxmlformats.org/drawingml/2006/main">
-            <a:pPr algn="l">
+            <a:pPr algn="l" marL="0" indent="0">
               <a:lnSpc>
                 <a:spcPct val="112000"/>
               </a:lnSpc>
@@ -6490,7 +6530,7 @@
             </a:r>
           </a:p>
           <a:p xmlns:a="http://schemas.openxmlformats.org/drawingml/2006/main">
-            <a:pPr algn="l">
+            <a:pPr algn="l" marL="0" indent="0">
               <a:lnSpc>
                 <a:spcPct val="112000"/>
               </a:lnSpc>
@@ -6523,7 +6563,7 @@
             </a:r>
           </a:p>
           <a:p xmlns:a="http://schemas.openxmlformats.org/drawingml/2006/main">
-            <a:pPr algn="l">
+            <a:pPr algn="l" marL="0" indent="0">
               <a:lnSpc>
                 <a:spcPct val="112000"/>
               </a:lnSpc>
@@ -6552,11 +6592,11 @@
                 <a:ea typeface="Roboto"/>
                 <a:cs typeface="Roboto"/>
               </a:rPr>
-              <a:t>приёмки и SLA, ошибки пилота</a:t>
-            </a:r>
-          </a:p>
-          <a:p xmlns:a="http://schemas.openxmlformats.org/drawingml/2006/main">
-            <a:pPr algn="l">
+              <a:t>приёмки, SLA и правила</a:t>
+            </a:r>
+          </a:p>
+          <a:p xmlns:a="http://schemas.openxmlformats.org/drawingml/2006/main">
+            <a:pPr algn="l" marL="0" indent="0">
               <a:lnSpc>
                 <a:spcPct val="112000"/>
               </a:lnSpc>
@@ -6585,7 +6625,7 @@
                 <a:ea typeface="Roboto"/>
                 <a:cs typeface="Roboto"/>
               </a:rPr>
-              <a:t>и правила следующей закупки.</a:t>
+              <a:t>следующей закупки.</a:t>
             </a:r>
           </a:p>
         </p:txBody>
@@ -6723,7 +6763,7 @@
           </a:bodyPr>
           <a:lstStyle xmlns:a="http://schemas.openxmlformats.org/drawingml/2006/main"/>
           <a:p xmlns:a="http://schemas.openxmlformats.org/drawingml/2006/main">
-            <a:pPr algn="ctr">
+            <a:pPr algn="l" marL="0" indent="0">
               <a:buClr>
                 <a:srgbClr val="FFFFFF"/>
               </a:buClr>
@@ -6874,7 +6914,7 @@
           </a:bodyPr>
           <a:lstStyle xmlns:a="http://schemas.openxmlformats.org/drawingml/2006/main"/>
           <a:p xmlns:a="http://schemas.openxmlformats.org/drawingml/2006/main">
-            <a:pPr algn="ctr">
+            <a:pPr algn="l" marL="0" indent="0">
               <a:buClr>
                 <a:srgbClr val="FFFFFF"/>
               </a:buClr>
@@ -6913,6 +6953,7 @@
           <a:bodyPr xmlns:a="http://schemas.openxmlformats.org/drawingml/2006/main"/>
           <a:lstStyle xmlns:a="http://schemas.openxmlformats.org/drawingml/2006/main"/>
           <a:p xmlns:a="http://schemas.openxmlformats.org/drawingml/2006/main">
+            <a:pPr marL="0" indent="0"/>
             <a:endParaRPr sz="1100"/>
           </a:p>
         </p:txBody>
@@ -6945,7 +6986,7 @@
           </a:bodyPr>
           <a:lstStyle xmlns:a="http://schemas.openxmlformats.org/drawingml/2006/main"/>
           <a:p xmlns:a="http://schemas.openxmlformats.org/drawingml/2006/main">
-            <a:pPr algn="l">
+            <a:pPr algn="l" marL="0" indent="0">
               <a:lnSpc>
                 <a:spcPct val="112000"/>
               </a:lnSpc>
@@ -7030,7 +7071,7 @@
           <a:bodyPr xmlns:a="http://schemas.openxmlformats.org/drawingml/2006/main" anchor="ctr"/>
           <a:lstStyle xmlns:a="http://schemas.openxmlformats.org/drawingml/2006/main"/>
           <a:p xmlns:a="http://schemas.openxmlformats.org/drawingml/2006/main">
-            <a:pPr algn="ctr">
+            <a:pPr algn="l" marL="0" indent="0">
               <a:buNone/>
             </a:pPr>
             <a:endParaRPr>
@@ -7233,7 +7274,7 @@
             </a:lvl9pPr>
           </a:lstStyle>
           <a:p xmlns:a="http://schemas.openxmlformats.org/drawingml/2006/main">
-            <a:pPr algn="l">
+            <a:pPr algn="l" marL="0" indent="0">
               <a:lnSpc>
                 <a:spcPct val="112000"/>
               </a:lnSpc>
@@ -7266,7 +7307,7 @@
             </a:r>
           </a:p>
           <a:p xmlns:a="http://schemas.openxmlformats.org/drawingml/2006/main">
-            <a:pPr algn="l">
+            <a:pPr algn="l" marL="0" indent="0">
               <a:lnSpc>
                 <a:spcPct val="112000"/>
               </a:lnSpc>
@@ -7299,7 +7340,7 @@
             </a:r>
           </a:p>
           <a:p xmlns:a="http://schemas.openxmlformats.org/drawingml/2006/main">
-            <a:pPr algn="l">
+            <a:pPr algn="l" marL="0" indent="0">
               <a:lnSpc>
                 <a:spcPct val="112000"/>
               </a:lnSpc>
@@ -7332,7 +7373,7 @@
             </a:r>
           </a:p>
           <a:p xmlns:a="http://schemas.openxmlformats.org/drawingml/2006/main">
-            <a:pPr algn="l">
+            <a:pPr algn="l" marL="0" indent="0">
               <a:lnSpc>
                 <a:spcPct val="112000"/>
               </a:lnSpc>
@@ -7361,7 +7402,7 @@
                 <a:ea typeface="Roboto"/>
                 <a:cs typeface="Roboto"/>
               </a:rPr>
-              <a:t>договор и расчётный инструмент.</a:t>
+              <a:t>договор и инструмент.</a:t>
             </a:r>
           </a:p>
         </p:txBody>
@@ -7499,7 +7540,7 @@
           </a:bodyPr>
           <a:lstStyle xmlns:a="http://schemas.openxmlformats.org/drawingml/2006/main"/>
           <a:p xmlns:a="http://schemas.openxmlformats.org/drawingml/2006/main">
-            <a:pPr algn="ctr">
+            <a:pPr algn="l" marL="0" indent="0">
               <a:buClr>
                 <a:srgbClr val="FFFFFF"/>
               </a:buClr>
@@ -7709,7 +7750,7 @@
             </a:lvl9pPr>
           </a:lstStyle>
           <a:p xmlns:a="http://schemas.openxmlformats.org/drawingml/2006/main">
-            <a:pPr algn="l">
+            <a:pPr algn="l" marL="0" indent="0">
               <a:lnSpc>
                 <a:spcPct val="112000"/>
               </a:lnSpc>
@@ -7738,11 +7779,11 @@
                 <a:ea typeface="Roboto"/>
                 <a:cs typeface="Roboto"/>
               </a:rPr>
-              <a:t>Кандидат — FLOOD на Дальнем Востоке, решение с 3-го года при устойчивых KPI.</a:t>
-            </a:r>
-          </a:p>
-          <a:p xmlns:a="http://schemas.openxmlformats.org/drawingml/2006/main">
-            <a:pPr algn="l">
+              <a:t>Кандидат — FLOOD, решение с 3-го года при устойчивых KPI.</a:t>
+            </a:r>
+          </a:p>
+          <a:p xmlns:a="http://schemas.openxmlformats.org/drawingml/2006/main">
+            <a:pPr algn="l" marL="0" indent="0">
               <a:lnSpc>
                 <a:spcPct val="112000"/>
               </a:lnSpc>
@@ -7771,11 +7812,11 @@
                 <a:ea typeface="Roboto"/>
                 <a:cs typeface="Roboto"/>
               </a:rPr>
-              <a:t>Потребуются новая проверка бюджета, совместимости и региональной сметы.</a:t>
-            </a:r>
-          </a:p>
-          <a:p xmlns:a="http://schemas.openxmlformats.org/drawingml/2006/main">
-            <a:pPr algn="l">
+              <a:t>Нужны проверка бюджета, совместимости и сметы.</a:t>
+            </a:r>
+          </a:p>
+          <a:p xmlns:a="http://schemas.openxmlformats.org/drawingml/2006/main">
+            <a:pPr algn="l" marL="0" indent="0">
               <a:lnSpc>
                 <a:spcPct val="112000"/>
               </a:lnSpc>
@@ -7804,7 +7845,7 @@
                 <a:ea typeface="Roboto"/>
                 <a:cs typeface="Roboto"/>
               </a:rPr>
-              <a:t>Пятый лот не является решением текущего кейса с ограничением «ровно четыре».</a:t>
+              <a:t/>
             </a:r>
           </a:p>
         </p:txBody>
@@ -8001,7 +8042,7 @@
             </a:lvl9pPr>
           </a:lstStyle>
           <a:p xmlns:a="http://schemas.openxmlformats.org/drawingml/2006/main">
-            <a:pPr algn="l">
+            <a:pPr algn="l" marL="0" indent="0">
               <a:lnSpc>
                 <a:spcPct val="112000"/>
               </a:lnSpc>
@@ -8068,7 +8109,7 @@
           </a:bodyPr>
           <a:lstStyle xmlns:a="http://schemas.openxmlformats.org/drawingml/2006/main"/>
           <a:p xmlns:a="http://schemas.openxmlformats.org/drawingml/2006/main">
-            <a:pPr algn="l">
+            <a:pPr algn="l" marL="0" indent="0">
               <a:lnSpc>
                 <a:spcPct val="112000"/>
               </a:lnSpc>
@@ -8097,7 +8138,7 @@
                 <a:ea typeface="Roboto"/>
                 <a:cs typeface="Roboto"/>
               </a:rPr>
-              <a:t>П8 · Портфельный scale = 4,675 при среднем 4,5 по восьми лотам; это индекс кейса, не доказанная экономия.</a:t>
+              <a:t>П8 · Портфельный scale = 4,675 при среднем 4,5 по восьми лотам — индекс кейса.</a:t>
             </a:r>
           </a:p>
         </p:txBody>
@@ -8152,7 +8193,7 @@
           </a:bodyPr>
           <a:lstStyle xmlns:a="http://schemas.openxmlformats.org/drawingml/2006/main"/>
           <a:p xmlns:a="http://schemas.openxmlformats.org/drawingml/2006/main">
-            <a:pPr algn="l">
+            <a:pPr algn="l" marL="0" indent="0">
               <a:lnSpc>
                 <a:spcPct val="112000"/>
               </a:lnSpc>
@@ -8185,7 +8226,7 @@
             </a:r>
           </a:p>
           <a:p xmlns:a="http://schemas.openxmlformats.org/drawingml/2006/main">
-            <a:pPr algn="l">
+            <a:pPr algn="l" marL="0" indent="0">
               <a:lnSpc>
                 <a:spcPct val="112000"/>
               </a:lnSpc>
@@ -8218,7 +8259,7 @@
             </a:r>
           </a:p>
           <a:p xmlns:a="http://schemas.openxmlformats.org/drawingml/2006/main">
-            <a:pPr algn="l">
+            <a:pPr algn="l" marL="0" indent="0">
               <a:lnSpc>
                 <a:spcPct val="112000"/>
               </a:lnSpc>
@@ -8280,7 +8321,7 @@
           </a:bodyPr>
           <a:lstStyle xmlns:a="http://schemas.openxmlformats.org/drawingml/2006/main"/>
           <a:p xmlns:a="http://schemas.openxmlformats.org/drawingml/2006/main">
-            <a:pPr algn="r">
+            <a:pPr algn="r" marL="0" indent="0">
               <a:lnSpc>
                 <a:spcPct val="112000"/>
               </a:lnSpc>
@@ -8342,7 +8383,7 @@
           </a:bodyPr>
           <a:lstStyle xmlns:a="http://schemas.openxmlformats.org/drawingml/2006/main"/>
           <a:p xmlns:a="http://schemas.openxmlformats.org/drawingml/2006/main">
-            <a:pPr algn="l">
+            <a:pPr algn="l" marL="0" indent="0">
               <a:lnSpc>
                 <a:spcPct val="112000"/>
               </a:lnSpc>
@@ -8404,7 +8445,7 @@
           </a:bodyPr>
           <a:lstStyle xmlns:a="http://schemas.openxmlformats.org/drawingml/2006/main"/>
           <a:p xmlns:a="http://schemas.openxmlformats.org/drawingml/2006/main">
-            <a:pPr algn="l">
+            <a:pPr algn="l" marL="0" indent="0">
               <a:lnSpc>
                 <a:spcPct val="112000"/>
               </a:lnSpc>
@@ -8437,7 +8478,7 @@
             </a:r>
           </a:p>
           <a:p xmlns:a="http://schemas.openxmlformats.org/drawingml/2006/main">
-            <a:pPr algn="l">
+            <a:pPr algn="l" marL="0" indent="0">
               <a:lnSpc>
                 <a:spcPct val="112000"/>
               </a:lnSpc>
@@ -8470,7 +8511,7 @@
             </a:r>
           </a:p>
           <a:p xmlns:a="http://schemas.openxmlformats.org/drawingml/2006/main">
-            <a:pPr algn="l">
+            <a:pPr algn="l" marL="0" indent="0">
               <a:lnSpc>
                 <a:spcPct val="112000"/>
               </a:lnSpc>
@@ -8532,7 +8573,7 @@
           </a:bodyPr>
           <a:lstStyle xmlns:a="http://schemas.openxmlformats.org/drawingml/2006/main"/>
           <a:p xmlns:a="http://schemas.openxmlformats.org/drawingml/2006/main">
-            <a:pPr algn="l">
+            <a:pPr algn="l" marL="0" indent="0">
               <a:lnSpc>
                 <a:spcPct val="112000"/>
               </a:lnSpc>
@@ -8565,7 +8606,7 @@
             </a:r>
           </a:p>
           <a:p xmlns:a="http://schemas.openxmlformats.org/drawingml/2006/main">
-            <a:pPr algn="l">
+            <a:pPr algn="l" marL="0" indent="0">
               <a:lnSpc>
                 <a:spcPct val="112000"/>
               </a:lnSpc>
@@ -8598,7 +8639,7 @@
             </a:r>
           </a:p>
           <a:p xmlns:a="http://schemas.openxmlformats.org/drawingml/2006/main">
-            <a:pPr algn="l">
+            <a:pPr algn="l" marL="0" indent="0">
               <a:lnSpc>
                 <a:spcPct val="112000"/>
               </a:lnSpc>
@@ -9016,7 +9057,7 @@
             </a:lvl9pPr>
           </a:lstStyle>
           <a:p xmlns:a="http://schemas.openxmlformats.org/drawingml/2006/main">
-            <a:pPr algn="l">
+            <a:pPr algn="l" marL="0" indent="0">
               <a:lnSpc>
                 <a:spcPct val="112000"/>
               </a:lnSpc>
@@ -9242,7 +9283,7 @@
             </a:lvl9pPr>
           </a:lstStyle>
           <a:p xmlns:a="http://schemas.openxmlformats.org/drawingml/2006/main">
-            <a:pPr algn="l">
+            <a:pPr algn="l" marL="0" indent="0">
               <a:lnSpc>
                 <a:spcPct val="112000"/>
               </a:lnSpc>
@@ -9468,7 +9509,7 @@
             </a:lvl9pPr>
           </a:lstStyle>
           <a:p xmlns:a="http://schemas.openxmlformats.org/drawingml/2006/main">
-            <a:pPr algn="l">
+            <a:pPr algn="l" marL="0" indent="0">
               <a:lnSpc>
                 <a:spcPct val="112000"/>
               </a:lnSpc>
@@ -9523,6 +9564,7 @@
           <a:bodyPr xmlns:a="http://schemas.openxmlformats.org/drawingml/2006/main"/>
           <a:lstStyle xmlns:a="http://schemas.openxmlformats.org/drawingml/2006/main"/>
           <a:p xmlns:a="http://schemas.openxmlformats.org/drawingml/2006/main">
+            <a:pPr marL="0" indent="0"/>
             <a:endParaRPr sz="1100"/>
           </a:p>
         </p:txBody>
@@ -9560,7 +9602,7 @@
           </a:bodyPr>
           <a:lstStyle xmlns:a="http://schemas.openxmlformats.org/drawingml/2006/main"/>
           <a:p xmlns:a="http://schemas.openxmlformats.org/drawingml/2006/main">
-            <a:pPr algn="l">
+            <a:pPr algn="l" marL="0" indent="0">
               <a:lnSpc>
                 <a:spcPct val="112000"/>
               </a:lnSpc>
@@ -9741,7 +9783,29 @@
                           <a:ea typeface="Roboto"/>
                           <a:cs typeface="Roboto"/>
                         </a:rPr>
-                        <a:t>kcash ≥ 1; SLA ≥ 99%</a:t>
+                        <a:t>k</a:t>
+                      </a:r>
+                      <a:r>
+                        <a:rPr sz="1350" b="0" baseline="-25000">
+                          <a:solidFill>
+                            <a:srgbClr val="17212F"/>
+                          </a:solidFill>
+                          <a:latin typeface="Roboto"/>
+                          <a:ea typeface="Roboto"/>
+                          <a:cs typeface="Roboto"/>
+                        </a:rPr>
+                        <a:t>cash</a:t>
+                      </a:r>
+                      <a:r>
+                        <a:rPr sz="1350" b="0">
+                          <a:solidFill>
+                            <a:srgbClr val="17212F"/>
+                          </a:solidFill>
+                          <a:latin typeface="Roboto"/>
+                          <a:ea typeface="Roboto"/>
+                          <a:cs typeface="Roboto"/>
+                        </a:rPr>
+                        <a:t> ≥ 1; SLA ≥ 99%</a:t>
                       </a:r>
                     </a:p>
                   </a:txBody>
@@ -9899,7 +9963,7 @@
           </a:bodyPr>
           <a:lstStyle xmlns:a="http://schemas.openxmlformats.org/drawingml/2006/main"/>
           <a:p xmlns:a="http://schemas.openxmlformats.org/drawingml/2006/main">
-            <a:pPr algn="l">
+            <a:pPr algn="l" marL="0" indent="0">
               <a:lnSpc>
                 <a:spcPct val="112000"/>
               </a:lnSpc>
@@ -9928,7 +9992,7 @@
                 <a:ea typeface="Roboto"/>
                 <a:cs typeface="Roboto"/>
               </a:rPr>
-              <a:t>П9 · ¹ Отчёты профильных служб, проверка заказчиком. KPI — цели; зависимости и полный контроль — в заметках.</a:t>
+              <a:t>П9 · ¹ Отчёты профильных служб, проверка заказчиком. KPI заданы как цели.</a:t>
             </a:r>
           </a:p>
         </p:txBody>
@@ -9986,7 +10050,7 @@
           </a:bodyPr>
           <a:lstStyle xmlns:a="http://schemas.openxmlformats.org/drawingml/2006/main"/>
           <a:p xmlns:a="http://schemas.openxmlformats.org/drawingml/2006/main">
-            <a:pPr algn="r">
+            <a:pPr algn="r" marL="0" indent="0">
               <a:lnSpc>
                 <a:spcPct val="112000"/>
               </a:lnSpc>
@@ -10051,7 +10115,7 @@
           </a:bodyPr>
           <a:lstStyle xmlns:a="http://schemas.openxmlformats.org/drawingml/2006/main"/>
           <a:p xmlns:a="http://schemas.openxmlformats.org/drawingml/2006/main">
-            <a:pPr algn="l">
+            <a:pPr algn="l" marL="0" indent="0">
               <a:lnSpc>
                 <a:spcPct val="112000"/>
               </a:lnSpc>
@@ -10080,7 +10144,7 @@
                 <a:ea typeface="Roboto"/>
                 <a:cs typeface="Roboto"/>
               </a:rPr>
-              <a:t>Решение готово к проверке и защите</a:t>
+              <a:t>Как проверить решение</a:t>
             </a:r>
           </a:p>
         </p:txBody>
@@ -10106,6 +10170,7 @@
           <a:bodyPr xmlns:a="http://schemas.openxmlformats.org/drawingml/2006/main"/>
           <a:lstStyle xmlns:a="http://schemas.openxmlformats.org/drawingml/2006/main"/>
           <a:p xmlns:a="http://schemas.openxmlformats.org/drawingml/2006/main">
+            <a:pPr marL="0" indent="0"/>
             <a:endParaRPr sz="1100"/>
           </a:p>
         </p:txBody>
@@ -10302,7 +10367,7 @@
             </a:lvl9pPr>
           </a:lstStyle>
           <a:p xmlns:a="http://schemas.openxmlformats.org/drawingml/2006/main">
-            <a:pPr algn="l">
+            <a:pPr algn="l" marL="0" indent="0">
               <a:lnSpc>
                 <a:spcPct val="112000"/>
               </a:lnSpc>
@@ -10331,11 +10396,11 @@
                 <a:ea typeface="Roboto"/>
                 <a:cs typeface="Roboto"/>
               </a:rPr>
-              <a:t>1. Открыть выбранный портфель в evaluate.py.</a:t>
-            </a:r>
-          </a:p>
-          <a:p xmlns:a="http://schemas.openxmlformats.org/drawingml/2006/main">
-            <a:pPr algn="l">
+              <a:t>1. Пересчитать портфель в evaluate.py.</a:t>
+            </a:r>
+          </a:p>
+          <a:p xmlns:a="http://schemas.openxmlformats.org/drawingml/2006/main">
+            <a:pPr algn="l" marL="0" indent="0">
               <a:lnSpc>
                 <a:spcPct val="112000"/>
               </a:lnSpc>
@@ -10368,7 +10433,7 @@
             </a:r>
           </a:p>
           <a:p xmlns:a="http://schemas.openxmlformats.org/drawingml/2006/main">
-            <a:pPr algn="l">
+            <a:pPr algn="l" marL="0" indent="0">
               <a:lnSpc>
                 <a:spcPct val="112000"/>
               </a:lnSpc>
@@ -10401,7 +10466,7 @@
             </a:r>
           </a:p>
           <a:p xmlns:a="http://schemas.openxmlformats.org/drawingml/2006/main">
-            <a:pPr algn="l">
+            <a:pPr algn="l" marL="0" indent="0">
               <a:lnSpc>
                 <a:spcPct val="112000"/>
               </a:lnSpc>
@@ -10430,11 +10495,11 @@
                 <a:ea typeface="Roboto"/>
                 <a:cs typeface="Roboto"/>
               </a:rPr>
-              <a:t>3. Изменить ставку / горизонт / веса</a:t>
-            </a:r>
-          </a:p>
-          <a:p xmlns:a="http://schemas.openxmlformats.org/drawingml/2006/main">
-            <a:pPr algn="l">
+              <a:t>3. Сменить ставку, горизонт, веса</a:t>
+            </a:r>
+          </a:p>
+          <a:p xmlns:a="http://schemas.openxmlformats.org/drawingml/2006/main">
+            <a:pPr algn="l" marL="0" indent="0">
               <a:lnSpc>
                 <a:spcPct val="112000"/>
               </a:lnSpc>
@@ -10463,11 +10528,11 @@
                 <a:ea typeface="Roboto"/>
                 <a:cs typeface="Roboto"/>
               </a:rPr>
-              <a:t>    без правки кода, показать новый расчёт.</a:t>
-            </a:r>
-          </a:p>
-          <a:p xmlns:a="http://schemas.openxmlformats.org/drawingml/2006/main">
-            <a:pPr algn="l">
+              <a:t>    без правки кода.</a:t>
+            </a:r>
+          </a:p>
+          <a:p xmlns:a="http://schemas.openxmlformats.org/drawingml/2006/main">
+            <a:pPr algn="l" marL="0" indent="0">
               <a:lnSpc>
                 <a:spcPct val="112000"/>
               </a:lnSpc>
@@ -10496,11 +10561,11 @@
                 <a:ea typeface="Roboto"/>
                 <a:cs typeface="Roboto"/>
               </a:rPr>
-              <a:t>4. Открыть недопустимый пример:</a:t>
-            </a:r>
-          </a:p>
-          <a:p xmlns:a="http://schemas.openxmlformats.org/drawingml/2006/main">
-            <a:pPr algn="l">
+              <a:t>4. Недопустимый портфель:</a:t>
+            </a:r>
+          </a:p>
+          <a:p xmlns:a="http://schemas.openxmlformats.org/drawingml/2006/main">
+            <a:pPr algn="l" marL="0" indent="0">
               <a:lnSpc>
                 <a:spcPct val="112000"/>
               </a:lnSpc>
@@ -10529,11 +10594,11 @@
                 <a:ea typeface="Roboto"/>
                 <a:cs typeface="Roboto"/>
               </a:rPr>
-              <a:t>    увидеть порог, факт, запас и FAIL.</a:t>
-            </a:r>
-          </a:p>
-          <a:p xmlns:a="http://schemas.openxmlformats.org/drawingml/2006/main">
-            <a:pPr algn="l">
+              <a:t>    порог, факт, запас, FAIL.</a:t>
+            </a:r>
+          </a:p>
+          <a:p xmlns:a="http://schemas.openxmlformats.org/drawingml/2006/main">
+            <a:pPr algn="l" marL="0" indent="0">
               <a:lnSpc>
                 <a:spcPct val="112000"/>
               </a:lnSpc>
@@ -10562,11 +10627,11 @@
                 <a:ea typeface="Roboto"/>
                 <a:cs typeface="Roboto"/>
               </a:rPr>
-              <a:t>Инструкция — test-main/RUN.md;</a:t>
-            </a:r>
-          </a:p>
-          <a:p xmlns:a="http://schemas.openxmlformats.org/drawingml/2006/main">
-            <a:pPr algn="l">
+              <a:t>test-main/RUN.md · работает офлайн.</a:t>
+            </a:r>
+          </a:p>
+          <a:p xmlns:a="http://schemas.openxmlformats.org/drawingml/2006/main">
+            <a:pPr algn="l" marL="0" indent="0">
               <a:lnSpc>
                 <a:spcPct val="112000"/>
               </a:lnSpc>
@@ -10595,7 +10660,7 @@
                 <a:ea typeface="Roboto"/>
                 <a:cs typeface="Roboto"/>
               </a:rPr>
-              <a:t>расчёт офлайн после установки зависимостей.</a:t>
+              <a:t/>
             </a:r>
           </a:p>
         </p:txBody>
@@ -10792,7 +10857,7 @@
             </a:lvl9pPr>
           </a:lstStyle>
           <a:p xmlns:a="http://schemas.openxmlformats.org/drawingml/2006/main">
-            <a:pPr algn="l">
+            <a:pPr algn="l" marL="0" indent="0">
               <a:lnSpc>
                 <a:spcPct val="112000"/>
               </a:lnSpc>
@@ -11018,7 +11083,7 @@
             </a:lvl9pPr>
           </a:lstStyle>
           <a:p xmlns:a="http://schemas.openxmlformats.org/drawingml/2006/main">
-            <a:pPr algn="l">
+            <a:pPr algn="l" marL="0" indent="0">
               <a:lnSpc>
                 <a:spcPct val="112000"/>
               </a:lnSpc>
@@ -11051,7 +11116,7 @@
             </a:r>
           </a:p>
           <a:p xmlns:a="http://schemas.openxmlformats.org/drawingml/2006/main">
-            <a:pPr algn="l">
+            <a:pPr algn="l" marL="0" indent="0">
               <a:lnSpc>
                 <a:spcPct val="112000"/>
               </a:lnSpc>
@@ -11115,7 +11180,7 @@
           </a:bodyPr>
           <a:lstStyle xmlns:a="http://schemas.openxmlformats.org/drawingml/2006/main"/>
           <a:p xmlns:a="http://schemas.openxmlformats.org/drawingml/2006/main">
-            <a:pPr algn="l">
+            <a:pPr algn="l" marL="0" indent="0">
               <a:lnSpc>
                 <a:spcPct val="112000"/>
               </a:lnSpc>
@@ -11200,7 +11265,7 @@
           <a:bodyPr xmlns:a="http://schemas.openxmlformats.org/drawingml/2006/main" anchor="ctr"/>
           <a:lstStyle xmlns:a="http://schemas.openxmlformats.org/drawingml/2006/main"/>
           <a:p xmlns:a="http://schemas.openxmlformats.org/drawingml/2006/main">
-            <a:pPr algn="ctr">
+            <a:pPr algn="ctr" marL="0" indent="0">
               <a:buNone/>
             </a:pPr>
             <a:endParaRPr>
@@ -11403,7 +11468,7 @@
             </a:lvl9pPr>
           </a:lstStyle>
           <a:p xmlns:a="http://schemas.openxmlformats.org/drawingml/2006/main">
-            <a:pPr algn="l">
+            <a:pPr algn="l" marL="0" indent="0">
               <a:lnSpc>
                 <a:spcPct val="112000"/>
               </a:lnSpc>
@@ -11436,7 +11501,7 @@
             </a:r>
           </a:p>
           <a:p xmlns:a="http://schemas.openxmlformats.org/drawingml/2006/main">
-            <a:pPr algn="l">
+            <a:pPr algn="l" marL="0" indent="0">
               <a:lnSpc>
                 <a:spcPct val="112000"/>
               </a:lnSpc>
@@ -11465,7 +11530,7 @@
                 <a:ea typeface="Roboto"/>
                 <a:cs typeface="Roboto"/>
               </a:rPr>
-              <a:t>Предлагаемое финансирование C0: 1 104 млн.</a:t>
+              <a:t>Финансирование C0: 1 104 млн.</a:t>
             </a:r>
           </a:p>
         </p:txBody>
@@ -11500,7 +11565,7 @@
           </a:bodyPr>
           <a:lstStyle xmlns:a="http://schemas.openxmlformats.org/drawingml/2006/main"/>
           <a:p xmlns:a="http://schemas.openxmlformats.org/drawingml/2006/main">
-            <a:pPr algn="l">
+            <a:pPr algn="l" marL="0" indent="0">
               <a:lnSpc>
                 <a:spcPct val="112000"/>
               </a:lnSpc>
@@ -11585,7 +11650,7 @@
           <a:bodyPr xmlns:a="http://schemas.openxmlformats.org/drawingml/2006/main" anchor="ctr"/>
           <a:lstStyle xmlns:a="http://schemas.openxmlformats.org/drawingml/2006/main"/>
           <a:p xmlns:a="http://schemas.openxmlformats.org/drawingml/2006/main">
-            <a:pPr algn="ctr">
+            <a:pPr algn="ctr" marL="0" indent="0">
               <a:buNone/>
             </a:pPr>
             <a:endParaRPr>
@@ -11788,7 +11853,7 @@
             </a:lvl9pPr>
           </a:lstStyle>
           <a:p xmlns:a="http://schemas.openxmlformats.org/drawingml/2006/main">
-            <a:pPr algn="l">
+            <a:pPr algn="l" marL="0" indent="0">
               <a:lnSpc>
                 <a:spcPct val="112000"/>
               </a:lnSpc>
@@ -11821,7 +11886,7 @@
             </a:r>
           </a:p>
           <a:p xmlns:a="http://schemas.openxmlformats.org/drawingml/2006/main">
-            <a:pPr algn="l">
+            <a:pPr algn="l" marL="0" indent="0">
               <a:lnSpc>
                 <a:spcPct val="112000"/>
               </a:lnSpc>
@@ -11885,7 +11950,7 @@
           </a:bodyPr>
           <a:lstStyle xmlns:a="http://schemas.openxmlformats.org/drawingml/2006/main"/>
           <a:p xmlns:a="http://schemas.openxmlformats.org/drawingml/2006/main">
-            <a:pPr algn="l">
+            <a:pPr algn="l" marL="0" indent="0">
               <a:lnSpc>
                 <a:spcPct val="112000"/>
               </a:lnSpc>
@@ -11970,7 +12035,7 @@
           <a:bodyPr xmlns:a="http://schemas.openxmlformats.org/drawingml/2006/main" anchor="ctr"/>
           <a:lstStyle xmlns:a="http://schemas.openxmlformats.org/drawingml/2006/main"/>
           <a:p xmlns:a="http://schemas.openxmlformats.org/drawingml/2006/main">
-            <a:pPr algn="ctr">
+            <a:pPr algn="ctr" marL="0" indent="0">
               <a:buNone/>
             </a:pPr>
             <a:endParaRPr>
@@ -12014,7 +12079,7 @@
           </a:bodyPr>
           <a:lstStyle xmlns:a="http://schemas.openxmlformats.org/drawingml/2006/main"/>
           <a:p xmlns:a="http://schemas.openxmlformats.org/drawingml/2006/main">
-            <a:pPr algn="l">
+            <a:pPr algn="l" marL="0" indent="0">
               <a:lnSpc>
                 <a:spcPct val="112000"/>
               </a:lnSpc>
@@ -12043,7 +12108,7 @@
                 <a:ea typeface="Roboto"/>
                 <a:cs typeface="Roboto"/>
               </a:rPr>
-              <a:t>Т1–Т5 · Для защиты нужен живой пересчёт. Python + pandas + numpy; команды запуска — test-main/RUN.md.</a:t>
+              <a:t>Т1–Т5 · Python, pandas, numpy. Команды запуска — test-main/RUN.md.</a:t>
             </a:r>
           </a:p>
         </p:txBody>
@@ -12101,7 +12166,7 @@
           </a:bodyPr>
           <a:lstStyle xmlns:a="http://schemas.openxmlformats.org/drawingml/2006/main"/>
           <a:p xmlns:a="http://schemas.openxmlformats.org/drawingml/2006/main">
-            <a:pPr algn="r">
+            <a:pPr algn="r" marL="0" indent="0">
               <a:lnSpc>
                 <a:spcPct val="112000"/>
               </a:lnSpc>
@@ -12166,7 +12231,7 @@
           </a:bodyPr>
           <a:lstStyle xmlns:a="http://schemas.openxmlformats.org/drawingml/2006/main"/>
           <a:p xmlns:a="http://schemas.openxmlformats.org/drawingml/2006/main">
-            <a:pPr algn="l">
+            <a:pPr algn="l" marL="0" indent="0">
               <a:lnSpc>
                 <a:spcPct val="112000"/>
               </a:lnSpc>
@@ -12251,7 +12316,7 @@
           <a:bodyPr xmlns:a="http://schemas.openxmlformats.org/drawingml/2006/main" anchor="ctr"/>
           <a:lstStyle xmlns:a="http://schemas.openxmlformats.org/drawingml/2006/main"/>
           <a:p xmlns:a="http://schemas.openxmlformats.org/drawingml/2006/main">
-            <a:pPr algn="ctr">
+            <a:pPr algn="ctr" marL="0" indent="0">
               <a:buNone/>
             </a:pPr>
             <a:endParaRPr>
@@ -12313,7 +12378,7 @@
           <a:bodyPr xmlns:a="http://schemas.openxmlformats.org/drawingml/2006/main" anchor="ctr"/>
           <a:lstStyle xmlns:a="http://schemas.openxmlformats.org/drawingml/2006/main"/>
           <a:p xmlns:a="http://schemas.openxmlformats.org/drawingml/2006/main">
-            <a:pPr algn="ctr">
+            <a:pPr algn="ctr" marL="0" indent="0">
               <a:buNone/>
             </a:pPr>
             <a:endParaRPr>
@@ -12516,7 +12581,7 @@
             </a:lvl9pPr>
           </a:lstStyle>
           <a:p xmlns:a="http://schemas.openxmlformats.org/drawingml/2006/main">
-            <a:pPr algn="l">
+            <a:pPr algn="l" marL="0" indent="0">
               <a:lnSpc>
                 <a:spcPct val="112000"/>
               </a:lnSpc>
@@ -12549,7 +12614,7 @@
             </a:r>
           </a:p>
           <a:p xmlns:a="http://schemas.openxmlformats.org/drawingml/2006/main">
-            <a:pPr algn="l">
+            <a:pPr algn="l" marL="0" indent="0">
               <a:lnSpc>
                 <a:spcPct val="112000"/>
               </a:lnSpc>
@@ -12582,7 +12647,7 @@
             </a:r>
           </a:p>
           <a:p xmlns:a="http://schemas.openxmlformats.org/drawingml/2006/main">
-            <a:pPr algn="l">
+            <a:pPr algn="l" marL="0" indent="0">
               <a:lnSpc>
                 <a:spcPct val="112000"/>
               </a:lnSpc>
@@ -12611,7 +12676,7 @@
                 <a:ea typeface="Roboto"/>
                 <a:cs typeface="Roboto"/>
               </a:rPr>
-              <a:t>Ожидаемый эффект: снижение ущерба</a:t>
+              <a:t>Эффект: снижение ущерба</a:t>
             </a:r>
           </a:p>
         </p:txBody>
@@ -12667,7 +12732,7 @@
           <a:bodyPr xmlns:a="http://schemas.openxmlformats.org/drawingml/2006/main" anchor="ctr"/>
           <a:lstStyle xmlns:a="http://schemas.openxmlformats.org/drawingml/2006/main"/>
           <a:p xmlns:a="http://schemas.openxmlformats.org/drawingml/2006/main">
-            <a:pPr algn="ctr">
+            <a:pPr algn="ctr" marL="0" indent="0">
               <a:buNone/>
             </a:pPr>
             <a:endParaRPr>
@@ -12729,7 +12794,7 @@
           <a:bodyPr xmlns:a="http://schemas.openxmlformats.org/drawingml/2006/main" anchor="ctr"/>
           <a:lstStyle xmlns:a="http://schemas.openxmlformats.org/drawingml/2006/main"/>
           <a:p xmlns:a="http://schemas.openxmlformats.org/drawingml/2006/main">
-            <a:pPr algn="ctr">
+            <a:pPr algn="ctr" marL="0" indent="0">
               <a:buNone/>
             </a:pPr>
             <a:endParaRPr>
@@ -12761,6 +12826,7 @@
           <a:bodyPr xmlns:a="http://schemas.openxmlformats.org/drawingml/2006/main"/>
           <a:lstStyle xmlns:a="http://schemas.openxmlformats.org/drawingml/2006/main"/>
           <a:p xmlns:a="http://schemas.openxmlformats.org/drawingml/2006/main">
+            <a:pPr marL="0" indent="0"/>
             <a:endParaRPr sz="1100"/>
           </a:p>
         </p:txBody>
@@ -12957,7 +13023,7 @@
             </a:lvl9pPr>
           </a:lstStyle>
           <a:p xmlns:a="http://schemas.openxmlformats.org/drawingml/2006/main">
-            <a:pPr algn="l">
+            <a:pPr algn="l" marL="0" indent="0">
               <a:lnSpc>
                 <a:spcPct val="112000"/>
               </a:lnSpc>
@@ -12986,11 +13052,11 @@
                 <a:ea typeface="Roboto"/>
                 <a:cs typeface="Roboto"/>
               </a:rPr>
-              <a:t>Польза возникает, когда данные помогают принять решение. VPUB — условная оценка эффекта,</a:t>
-            </a:r>
-          </a:p>
-          <a:p xmlns:a="http://schemas.openxmlformats.org/drawingml/2006/main">
-            <a:pPr algn="l">
+              <a:t>VPUB — оценка эффекта по шкале кейса, а не выручка.</a:t>
+            </a:r>
+          </a:p>
+          <a:p xmlns:a="http://schemas.openxmlformats.org/drawingml/2006/main">
+            <a:pPr algn="l" marL="0" indent="0">
               <a:lnSpc>
                 <a:spcPct val="112000"/>
               </a:lnSpc>
@@ -13019,7 +13085,7 @@
                 <a:ea typeface="Roboto"/>
                 <a:cs typeface="Roboto"/>
               </a:rPr>
-              <a:t>а не выручка. Фактические эффекты и результаты пилотов в кейсе не измерены.</a:t>
+              <a:t/>
             </a:r>
           </a:p>
         </p:txBody>
@@ -13216,7 +13282,7 @@
             </a:lvl9pPr>
           </a:lstStyle>
           <a:p xmlns:a="http://schemas.openxmlformats.org/drawingml/2006/main">
-            <a:pPr algn="l">
+            <a:pPr algn="l" marL="0" indent="0">
               <a:lnSpc>
                 <a:spcPct val="112000"/>
               </a:lnSpc>
@@ -13245,7 +13311,7 @@
                 <a:ea typeface="Roboto"/>
                 <a:cs typeface="Roboto"/>
               </a:rPr>
-              <a:t>Выбираем сервис вместе с его получателем и действием</a:t>
+              <a:t>Получатель, потребность, эффект</a:t>
             </a:r>
           </a:p>
         </p:txBody>
@@ -13280,7 +13346,7 @@
           </a:bodyPr>
           <a:lstStyle xmlns:a="http://schemas.openxmlformats.org/drawingml/2006/main"/>
           <a:p xmlns:a="http://schemas.openxmlformats.org/drawingml/2006/main">
-            <a:pPr algn="l">
+            <a:pPr algn="l" marL="0" indent="0">
               <a:lnSpc>
                 <a:spcPct val="112000"/>
               </a:lnSpc>
@@ -13506,7 +13572,7 @@
             </a:lvl9pPr>
           </a:lstStyle>
           <a:p xmlns:a="http://schemas.openxmlformats.org/drawingml/2006/main">
-            <a:pPr algn="l">
+            <a:pPr algn="l" marL="0" indent="0">
               <a:lnSpc>
                 <a:spcPct val="112000"/>
               </a:lnSpc>
@@ -13539,7 +13605,7 @@
             </a:r>
           </a:p>
           <a:p xmlns:a="http://schemas.openxmlformats.org/drawingml/2006/main">
-            <a:pPr algn="l">
+            <a:pPr algn="l" marL="0" indent="0">
               <a:lnSpc>
                 <a:spcPct val="112000"/>
               </a:lnSpc>
@@ -13572,7 +13638,7 @@
             </a:r>
           </a:p>
           <a:p xmlns:a="http://schemas.openxmlformats.org/drawingml/2006/main">
-            <a:pPr algn="l">
+            <a:pPr algn="l" marL="0" indent="0">
               <a:lnSpc>
                 <a:spcPct val="112000"/>
               </a:lnSpc>
@@ -13601,7 +13667,7 @@
                 <a:ea typeface="Roboto"/>
                 <a:cs typeface="Roboto"/>
               </a:rPr>
-              <a:t>Ожидаемый эффект: экономия ресурсов</a:t>
+              <a:t>Эффект: экономия ресурсов</a:t>
             </a:r>
           </a:p>
         </p:txBody>
@@ -13636,7 +13702,7 @@
           </a:bodyPr>
           <a:lstStyle xmlns:a="http://schemas.openxmlformats.org/drawingml/2006/main"/>
           <a:p xmlns:a="http://schemas.openxmlformats.org/drawingml/2006/main">
-            <a:pPr algn="l">
+            <a:pPr algn="l" marL="0" indent="0">
               <a:lnSpc>
                 <a:spcPct val="112000"/>
               </a:lnSpc>
@@ -13862,7 +13928,7 @@
             </a:lvl9pPr>
           </a:lstStyle>
           <a:p xmlns:a="http://schemas.openxmlformats.org/drawingml/2006/main">
-            <a:pPr algn="l">
+            <a:pPr algn="l" marL="0" indent="0">
               <a:lnSpc>
                 <a:spcPct val="112000"/>
               </a:lnSpc>
@@ -13895,7 +13961,7 @@
             </a:r>
           </a:p>
           <a:p xmlns:a="http://schemas.openxmlformats.org/drawingml/2006/main">
-            <a:pPr algn="l">
+            <a:pPr algn="l" marL="0" indent="0">
               <a:lnSpc>
                 <a:spcPct val="112000"/>
               </a:lnSpc>
@@ -13928,7 +13994,7 @@
             </a:r>
           </a:p>
           <a:p xmlns:a="http://schemas.openxmlformats.org/drawingml/2006/main">
-            <a:pPr algn="l">
+            <a:pPr algn="l" marL="0" indent="0">
               <a:lnSpc>
                 <a:spcPct val="112000"/>
               </a:lnSpc>
@@ -13957,7 +14023,7 @@
                 <a:ea typeface="Roboto"/>
                 <a:cs typeface="Roboto"/>
               </a:rPr>
-              <a:t>Ожидаемый эффект: меньше заторов и аварий</a:t>
+              <a:t>Эффект: меньше заторов и аварий</a:t>
             </a:r>
           </a:p>
         </p:txBody>
@@ -13992,7 +14058,7 @@
           </a:bodyPr>
           <a:lstStyle xmlns:a="http://schemas.openxmlformats.org/drawingml/2006/main"/>
           <a:p xmlns:a="http://schemas.openxmlformats.org/drawingml/2006/main">
-            <a:pPr algn="l">
+            <a:pPr algn="l" marL="0" indent="0">
               <a:lnSpc>
                 <a:spcPct val="112000"/>
               </a:lnSpc>
@@ -14218,7 +14284,7 @@
             </a:lvl9pPr>
           </a:lstStyle>
           <a:p xmlns:a="http://schemas.openxmlformats.org/drawingml/2006/main">
-            <a:pPr algn="l">
+            <a:pPr algn="l" marL="0" indent="0">
               <a:lnSpc>
                 <a:spcPct val="112000"/>
               </a:lnSpc>
@@ -14251,7 +14317,7 @@
             </a:r>
           </a:p>
           <a:p xmlns:a="http://schemas.openxmlformats.org/drawingml/2006/main">
-            <a:pPr algn="l">
+            <a:pPr algn="l" marL="0" indent="0">
               <a:lnSpc>
                 <a:spcPct val="112000"/>
               </a:lnSpc>
@@ -14284,7 +14350,7 @@
             </a:r>
           </a:p>
           <a:p xmlns:a="http://schemas.openxmlformats.org/drawingml/2006/main">
-            <a:pPr algn="l">
+            <a:pPr algn="l" marL="0" indent="0">
               <a:lnSpc>
                 <a:spcPct val="112000"/>
               </a:lnSpc>
@@ -14313,7 +14379,7 @@
                 <a:ea typeface="Roboto"/>
                 <a:cs typeface="Roboto"/>
               </a:rPr>
-              <a:t>Ожидаемый эффект: снижение экориска</a:t>
+              <a:t>Эффект: снижение экориска</a:t>
             </a:r>
           </a:p>
         </p:txBody>
@@ -14348,7 +14414,7 @@
           </a:bodyPr>
           <a:lstStyle xmlns:a="http://schemas.openxmlformats.org/drawingml/2006/main"/>
           <a:p xmlns:a="http://schemas.openxmlformats.org/drawingml/2006/main">
-            <a:pPr algn="l">
+            <a:pPr algn="l" marL="0" indent="0">
               <a:lnSpc>
                 <a:spcPct val="112000"/>
               </a:lnSpc>
@@ -14415,7 +14481,7 @@
           </a:bodyPr>
           <a:lstStyle xmlns:a="http://schemas.openxmlformats.org/drawingml/2006/main"/>
           <a:p xmlns:a="http://schemas.openxmlformats.org/drawingml/2006/main">
-            <a:pPr algn="l">
+            <a:pPr algn="l" marL="0" indent="0">
               <a:lnSpc>
                 <a:spcPct val="112000"/>
               </a:lnSpc>
@@ -14502,7 +14568,7 @@
           </a:bodyPr>
           <a:lstStyle xmlns:a="http://schemas.openxmlformats.org/drawingml/2006/main"/>
           <a:p xmlns:a="http://schemas.openxmlformats.org/drawingml/2006/main">
-            <a:pPr algn="r">
+            <a:pPr algn="r" marL="0" indent="0">
               <a:lnSpc>
                 <a:spcPct val="112000"/>
               </a:lnSpc>
@@ -14567,7 +14633,7 @@
           </a:bodyPr>
           <a:lstStyle xmlns:a="http://schemas.openxmlformats.org/drawingml/2006/main"/>
           <a:p xmlns:a="http://schemas.openxmlformats.org/drawingml/2006/main">
-            <a:pPr algn="l">
+            <a:pPr algn="l" marL="0" indent="0">
               <a:lnSpc>
                 <a:spcPct val="112000"/>
               </a:lnSpc>
@@ -14622,6 +14688,7 @@
           <a:bodyPr xmlns:a="http://schemas.openxmlformats.org/drawingml/2006/main"/>
           <a:lstStyle xmlns:a="http://schemas.openxmlformats.org/drawingml/2006/main"/>
           <a:p xmlns:a="http://schemas.openxmlformats.org/drawingml/2006/main">
+            <a:pPr marL="0" indent="0"/>
             <a:endParaRPr sz="1100"/>
           </a:p>
         </p:txBody>
@@ -14818,7 +14885,7 @@
             </a:lvl9pPr>
           </a:lstStyle>
           <a:p xmlns:a="http://schemas.openxmlformats.org/drawingml/2006/main">
-            <a:pPr algn="l">
+            <a:pPr algn="l" marL="0" indent="0">
               <a:lnSpc>
                 <a:spcPct val="112000"/>
               </a:lnSpc>
@@ -14847,11 +14914,11 @@
                 <a:ea typeface="Roboto"/>
                 <a:cs typeface="Roboto"/>
               </a:rPr>
-              <a:t>8 лотов → 4 выбранных лота и их режимы.</a:t>
-            </a:r>
-          </a:p>
-          <a:p xmlns:a="http://schemas.openxmlformats.org/drawingml/2006/main">
-            <a:pPr algn="l">
+              <a:t>8 лотов → 4 лота с режимами.</a:t>
+            </a:r>
+          </a:p>
+          <a:p xmlns:a="http://schemas.openxmlformats.org/drawingml/2006/main">
+            <a:pPr algn="l" marL="0" indent="0">
               <a:lnSpc>
                 <a:spcPct val="112000"/>
               </a:lnSpc>
@@ -14880,11 +14947,11 @@
                 <a:ea typeface="Roboto"/>
                 <a:cs typeface="Roboto"/>
               </a:rPr>
-              <a:t>5 коэффициентов меняют C0, OPEX, VPUB,</a:t>
-            </a:r>
-          </a:p>
-          <a:p xmlns:a="http://schemas.openxmlformats.org/drawingml/2006/main">
-            <a:pPr algn="l">
+              <a:t>5 коэффициентов меняют C0, OPEX,</a:t>
+            </a:r>
+          </a:p>
+          <a:p xmlns:a="http://schemas.openxmlformats.org/drawingml/2006/main">
+            <a:pPr algn="l" marL="0" indent="0">
               <a:lnSpc>
                 <a:spcPct val="112000"/>
               </a:lnSpc>
@@ -14913,11 +14980,11 @@
                 <a:ea typeface="Roboto"/>
                 <a:cs typeface="Roboto"/>
               </a:rPr>
-              <a:t>якорные и коммерческие поступления.</a:t>
-            </a:r>
-          </a:p>
-          <a:p xmlns:a="http://schemas.openxmlformats.org/drawingml/2006/main">
-            <a:pPr algn="l">
+              <a:t>VPUB и поступления.</a:t>
+            </a:r>
+          </a:p>
+          <a:p xmlns:a="http://schemas.openxmlformats.org/drawingml/2006/main">
+            <a:pPr algn="l" marL="0" indent="0">
               <a:lnSpc>
                 <a:spcPct val="112000"/>
               </a:lnSpc>
@@ -14950,7 +15017,7 @@
             </a:r>
           </a:p>
           <a:p xmlns:a="http://schemas.openxmlformats.org/drawingml/2006/main">
-            <a:pPr algn="l">
+            <a:pPr algn="l" marL="0" indent="0">
               <a:lnSpc>
                 <a:spcPct val="112000"/>
               </a:lnSpc>
@@ -14983,7 +15050,7 @@
             </a:r>
           </a:p>
           <a:p xmlns:a="http://schemas.openxmlformats.org/drawingml/2006/main">
-            <a:pPr algn="l">
+            <a:pPr algn="l" marL="0" indent="0">
               <a:lnSpc>
                 <a:spcPct val="112000"/>
               </a:lnSpc>
@@ -15014,9 +15081,31 @@
               </a:rPr>
               <a:t>kcash = CASH / OPEX</a:t>
             </a:r>
-          </a:p>
-          <a:p xmlns:a="http://schemas.openxmlformats.org/drawingml/2006/main">
-            <a:pPr algn="l">
+            <a:r>
+              <a:rPr sz="1725" baseline="-25000">
+                <a:solidFill>
+                  <a:srgbClr val="17212F"/>
+                </a:solidFill>
+                <a:latin typeface="Roboto"/>
+                <a:ea typeface="Roboto"/>
+                <a:cs typeface="Roboto"/>
+              </a:rPr>
+              <a:t/>
+            </a:r>
+            <a:r>
+              <a:rPr sz="1725">
+                <a:solidFill>
+                  <a:srgbClr val="17212F"/>
+                </a:solidFill>
+                <a:latin typeface="Roboto"/>
+                <a:ea typeface="Roboto"/>
+                <a:cs typeface="Roboto"/>
+              </a:rPr>
+              <a:t/>
+            </a:r>
+          </a:p>
+          <a:p xmlns:a="http://schemas.openxmlformats.org/drawingml/2006/main">
+            <a:pPr algn="l" marL="0" indent="0">
               <a:lnSpc>
                 <a:spcPct val="112000"/>
               </a:lnSpc>
@@ -15045,11 +15134,11 @@
                 <a:ea typeface="Roboto"/>
                 <a:cs typeface="Roboto"/>
               </a:rPr>
-              <a:t>Ставка 10%, горизонт 10 лет, постоянные</a:t>
-            </a:r>
-          </a:p>
-          <a:p xmlns:a="http://schemas.openxmlformats.org/drawingml/2006/main">
-            <a:pPr algn="l">
+              <a:t>Ставка 10%, горизонт 10 лет —</a:t>
+            </a:r>
+          </a:p>
+          <a:p xmlns:a="http://schemas.openxmlformats.org/drawingml/2006/main">
+            <a:pPr algn="l" marL="0" indent="0">
               <a:lnSpc>
                 <a:spcPct val="112000"/>
               </a:lnSpc>
@@ -15078,11 +15167,11 @@
                 <a:ea typeface="Roboto"/>
                 <a:cs typeface="Roboto"/>
               </a:rPr>
-              <a:t>потоки — допущения команды.</a:t>
-            </a:r>
-          </a:p>
-          <a:p xmlns:a="http://schemas.openxmlformats.org/drawingml/2006/main">
-            <a:pPr algn="l">
+              <a:t>допущения команды.</a:t>
+            </a:r>
+          </a:p>
+          <a:p xmlns:a="http://schemas.openxmlformats.org/drawingml/2006/main">
+            <a:pPr algn="l" marL="0" indent="0">
               <a:lnSpc>
                 <a:spcPct val="112000"/>
               </a:lnSpc>
@@ -15111,7 +15200,7 @@
                 <a:ea typeface="Roboto"/>
                 <a:cs typeface="Roboto"/>
               </a:rPr>
-              <a:t>Исходный канонический расчёт сохранён.</a:t>
+              <a:t/>
             </a:r>
           </a:p>
         </p:txBody>
@@ -15308,7 +15397,7 @@
             </a:lvl9pPr>
           </a:lstStyle>
           <a:p xmlns:a="http://schemas.openxmlformats.org/drawingml/2006/main">
-            <a:pPr algn="l">
+            <a:pPr algn="l" marL="0" indent="0">
               <a:lnSpc>
                 <a:spcPct val="112000"/>
               </a:lnSpc>
@@ -15337,11 +15426,11 @@
                 <a:ea typeface="Roboto"/>
                 <a:cs typeface="Roboto"/>
               </a:rPr>
-              <a:t>Из данных организаторов</a:t>
-            </a:r>
-          </a:p>
-          <a:p xmlns:a="http://schemas.openxmlformats.org/drawingml/2006/main">
-            <a:pPr algn="l">
+              <a:t>От лотов к показателям портфеля</a:t>
+            </a:r>
+          </a:p>
+          <a:p xmlns:a="http://schemas.openxmlformats.org/drawingml/2006/main">
+            <a:pPr algn="l" marL="0" indent="0">
               <a:lnSpc>
                 <a:spcPct val="112000"/>
               </a:lnSpc>
@@ -15370,7 +15459,7 @@
                 <a:ea typeface="Roboto"/>
                 <a:cs typeface="Roboto"/>
               </a:rPr>
-              <a:t>в показатели портфеля</a:t>
+              <a:t/>
             </a:r>
           </a:p>
         </p:txBody>
@@ -15567,7 +15656,7 @@
             </a:lvl9pPr>
           </a:lstStyle>
           <a:p xmlns:a="http://schemas.openxmlformats.org/drawingml/2006/main">
-            <a:pPr algn="l">
+            <a:pPr algn="l" marL="0" indent="0">
               <a:lnSpc>
                 <a:spcPct val="112000"/>
               </a:lnSpc>
@@ -15596,11 +15685,44 @@
                 <a:ea typeface="Roboto"/>
                 <a:cs typeface="Roboto"/>
               </a:rPr>
-              <a:t>Сумма z(NPV), z(PI), z(kcash).</a:t>
-            </a:r>
-          </a:p>
-          <a:p xmlns:a="http://schemas.openxmlformats.org/drawingml/2006/main">
-            <a:pPr algn="l">
+              <a:t>Сумма z(NPV), z(PI), z(</a:t>
+            </a:r>
+            <a:r>
+              <a:rPr sz="1575">
+                <a:solidFill>
+                  <a:srgbClr val="17212F"/>
+                </a:solidFill>
+                <a:latin typeface="Roboto"/>
+                <a:ea typeface="Roboto"/>
+                <a:cs typeface="Roboto"/>
+              </a:rPr>
+              <a:t>k</a:t>
+            </a:r>
+            <a:r>
+              <a:rPr sz="1575" baseline="-25000">
+                <a:solidFill>
+                  <a:srgbClr val="17212F"/>
+                </a:solidFill>
+                <a:latin typeface="Roboto"/>
+                <a:ea typeface="Roboto"/>
+                <a:cs typeface="Roboto"/>
+              </a:rPr>
+              <a:t>cash</a:t>
+            </a:r>
+            <a:r>
+              <a:rPr sz="1575">
+                <a:solidFill>
+                  <a:srgbClr val="17212F"/>
+                </a:solidFill>
+                <a:latin typeface="Roboto"/>
+                <a:ea typeface="Roboto"/>
+                <a:cs typeface="Roboto"/>
+              </a:rPr>
+              <a:t>).</a:t>
+            </a:r>
+          </a:p>
+          <a:p xmlns:a="http://schemas.openxmlformats.org/drawingml/2006/main">
+            <a:pPr algn="l" marL="0" indent="0">
               <a:lnSpc>
                 <a:spcPct val="112000"/>
               </a:lnSpc>
@@ -15664,7 +15786,7 @@
           </a:bodyPr>
           <a:lstStyle xmlns:a="http://schemas.openxmlformats.org/drawingml/2006/main"/>
           <a:p xmlns:a="http://schemas.openxmlformats.org/drawingml/2006/main">
-            <a:pPr algn="l">
+            <a:pPr algn="l" marL="0" indent="0">
               <a:lnSpc>
                 <a:spcPct val="112000"/>
               </a:lnSpc>
@@ -15693,7 +15815,29 @@
                 <a:ea typeface="Roboto"/>
                 <a:cs typeface="Roboto"/>
               </a:rPr>
-              <a:t>Деньги · F_fin</a:t>
+              <a:t>Деньги · </a:t>
+            </a:r>
+            <a:r>
+              <a:rPr sz="1875" b="1">
+                <a:solidFill>
+                  <a:srgbClr val="3357B8"/>
+                </a:solidFill>
+                <a:latin typeface="Roboto"/>
+                <a:ea typeface="Roboto"/>
+                <a:cs typeface="Roboto"/>
+              </a:rPr>
+              <a:t>F</a:t>
+            </a:r>
+            <a:r>
+              <a:rPr sz="1875" b="1" baseline="-25000">
+                <a:solidFill>
+                  <a:srgbClr val="3357B8"/>
+                </a:solidFill>
+                <a:latin typeface="Roboto"/>
+                <a:ea typeface="Roboto"/>
+                <a:cs typeface="Roboto"/>
+              </a:rPr>
+              <a:t>fin</a:t>
             </a:r>
           </a:p>
         </p:txBody>
@@ -15749,7 +15893,7 @@
           <a:bodyPr xmlns:a="http://schemas.openxmlformats.org/drawingml/2006/main" anchor="ctr"/>
           <a:lstStyle xmlns:a="http://schemas.openxmlformats.org/drawingml/2006/main"/>
           <a:p xmlns:a="http://schemas.openxmlformats.org/drawingml/2006/main">
-            <a:pPr algn="ctr">
+            <a:pPr algn="ctr" marL="0" indent="0">
               <a:buNone/>
             </a:pPr>
             <a:endParaRPr>
@@ -15952,7 +16096,7 @@
             </a:lvl9pPr>
           </a:lstStyle>
           <a:p xmlns:a="http://schemas.openxmlformats.org/drawingml/2006/main">
-            <a:pPr algn="l">
+            <a:pPr algn="l" marL="0" indent="0">
               <a:lnSpc>
                 <a:spcPct val="112000"/>
               </a:lnSpc>
@@ -15985,7 +16129,7 @@
             </a:r>
           </a:p>
           <a:p xmlns:a="http://schemas.openxmlformats.org/drawingml/2006/main">
-            <a:pPr algn="l">
+            <a:pPr algn="l" marL="0" indent="0">
               <a:lnSpc>
                 <a:spcPct val="112000"/>
               </a:lnSpc>
@@ -16014,7 +16158,7 @@
                 <a:ea typeface="Roboto"/>
                 <a:cs typeface="Roboto"/>
               </a:rPr>
-              <a:t>Общественная оценка отделена от CASH.</a:t>
+              <a:t>VPUB не входит в CASH.</a:t>
             </a:r>
           </a:p>
         </p:txBody>
@@ -16049,7 +16193,7 @@
           </a:bodyPr>
           <a:lstStyle xmlns:a="http://schemas.openxmlformats.org/drawingml/2006/main"/>
           <a:p xmlns:a="http://schemas.openxmlformats.org/drawingml/2006/main">
-            <a:pPr algn="l">
+            <a:pPr algn="l" marL="0" indent="0">
               <a:lnSpc>
                 <a:spcPct val="112000"/>
               </a:lnSpc>
@@ -16078,7 +16222,29 @@
                 <a:ea typeface="Roboto"/>
                 <a:cs typeface="Roboto"/>
               </a:rPr>
-              <a:t>Общественная польза · F_public</a:t>
+              <a:t>Общественная польза · </a:t>
+            </a:r>
+            <a:r>
+              <a:rPr sz="1875" b="1">
+                <a:solidFill>
+                  <a:srgbClr val="3357B8"/>
+                </a:solidFill>
+                <a:latin typeface="Roboto"/>
+                <a:ea typeface="Roboto"/>
+                <a:cs typeface="Roboto"/>
+              </a:rPr>
+              <a:t>F</a:t>
+            </a:r>
+            <a:r>
+              <a:rPr sz="1875" b="1" baseline="-25000">
+                <a:solidFill>
+                  <a:srgbClr val="3357B8"/>
+                </a:solidFill>
+                <a:latin typeface="Roboto"/>
+                <a:ea typeface="Roboto"/>
+                <a:cs typeface="Roboto"/>
+              </a:rPr>
+              <a:t>public</a:t>
             </a:r>
           </a:p>
         </p:txBody>
@@ -16134,7 +16300,7 @@
           <a:bodyPr xmlns:a="http://schemas.openxmlformats.org/drawingml/2006/main" anchor="ctr"/>
           <a:lstStyle xmlns:a="http://schemas.openxmlformats.org/drawingml/2006/main"/>
           <a:p xmlns:a="http://schemas.openxmlformats.org/drawingml/2006/main">
-            <a:pPr algn="ctr">
+            <a:pPr algn="ctr" marL="0" indent="0">
               <a:buNone/>
             </a:pPr>
             <a:endParaRPr>
@@ -16337,7 +16503,7 @@
             </a:lvl9pPr>
           </a:lstStyle>
           <a:p xmlns:a="http://schemas.openxmlformats.org/drawingml/2006/main">
-            <a:pPr algn="l">
+            <a:pPr algn="l" marL="0" indent="0">
               <a:lnSpc>
                 <a:spcPct val="112000"/>
               </a:lnSpc>
@@ -16366,11 +16532,44 @@
                 <a:ea typeface="Roboto"/>
                 <a:cs typeface="Roboto"/>
               </a:rPr>
-              <a:t>Сумма z(t_rep), z(готовности),</a:t>
-            </a:r>
-          </a:p>
-          <a:p xmlns:a="http://schemas.openxmlformats.org/drawingml/2006/main">
-            <a:pPr algn="l">
+              <a:t>Сумма z(</a:t>
+            </a:r>
+            <a:r>
+              <a:rPr sz="1575">
+                <a:solidFill>
+                  <a:srgbClr val="17212F"/>
+                </a:solidFill>
+                <a:latin typeface="Roboto"/>
+                <a:ea typeface="Roboto"/>
+                <a:cs typeface="Roboto"/>
+              </a:rPr>
+              <a:t>t</a:t>
+            </a:r>
+            <a:r>
+              <a:rPr sz="1575" baseline="-25000">
+                <a:solidFill>
+                  <a:srgbClr val="17212F"/>
+                </a:solidFill>
+                <a:latin typeface="Roboto"/>
+                <a:ea typeface="Roboto"/>
+                <a:cs typeface="Roboto"/>
+              </a:rPr>
+              <a:t>rep</a:t>
+            </a:r>
+            <a:r>
+              <a:rPr sz="1575">
+                <a:solidFill>
+                  <a:srgbClr val="17212F"/>
+                </a:solidFill>
+                <a:latin typeface="Roboto"/>
+                <a:ea typeface="Roboto"/>
+                <a:cs typeface="Roboto"/>
+              </a:rPr>
+              <a:t>), z(готовности),</a:t>
+            </a:r>
+          </a:p>
+          <a:p xmlns:a="http://schemas.openxmlformats.org/drawingml/2006/main">
+            <a:pPr algn="l" marL="0" indent="0">
               <a:lnSpc>
                 <a:spcPct val="112000"/>
               </a:lnSpc>
@@ -16434,7 +16633,7 @@
           </a:bodyPr>
           <a:lstStyle xmlns:a="http://schemas.openxmlformats.org/drawingml/2006/main"/>
           <a:p xmlns:a="http://schemas.openxmlformats.org/drawingml/2006/main">
-            <a:pPr algn="l">
+            <a:pPr algn="l" marL="0" indent="0">
               <a:lnSpc>
                 <a:spcPct val="112000"/>
               </a:lnSpc>
@@ -16463,7 +16662,29 @@
                 <a:ea typeface="Roboto"/>
                 <a:cs typeface="Roboto"/>
               </a:rPr>
-              <a:t>Качество · F_quality</a:t>
+              <a:t>Качество · </a:t>
+            </a:r>
+            <a:r>
+              <a:rPr sz="1875" b="1">
+                <a:solidFill>
+                  <a:srgbClr val="3357B8"/>
+                </a:solidFill>
+                <a:latin typeface="Roboto"/>
+                <a:ea typeface="Roboto"/>
+                <a:cs typeface="Roboto"/>
+              </a:rPr>
+              <a:t>F</a:t>
+            </a:r>
+            <a:r>
+              <a:rPr sz="1875" b="1" baseline="-25000">
+                <a:solidFill>
+                  <a:srgbClr val="3357B8"/>
+                </a:solidFill>
+                <a:latin typeface="Roboto"/>
+                <a:ea typeface="Roboto"/>
+                <a:cs typeface="Roboto"/>
+              </a:rPr>
+              <a:t>quality</a:t>
             </a:r>
           </a:p>
         </p:txBody>
@@ -16519,7 +16740,7 @@
           <a:bodyPr xmlns:a="http://schemas.openxmlformats.org/drawingml/2006/main" anchor="ctr"/>
           <a:lstStyle xmlns:a="http://schemas.openxmlformats.org/drawingml/2006/main"/>
           <a:p xmlns:a="http://schemas.openxmlformats.org/drawingml/2006/main">
-            <a:pPr algn="ctr">
+            <a:pPr algn="ctr" marL="0" indent="0">
               <a:buNone/>
             </a:pPr>
             <a:endParaRPr>
@@ -16563,7 +16784,7 @@
           </a:bodyPr>
           <a:lstStyle xmlns:a="http://schemas.openxmlformats.org/drawingml/2006/main"/>
           <a:p xmlns:a="http://schemas.openxmlformats.org/drawingml/2006/main">
-            <a:pPr algn="l">
+            <a:pPr algn="l" marL="0" indent="0">
               <a:lnSpc>
                 <a:spcPct val="112000"/>
               </a:lnSpc>
@@ -16647,7 +16868,7 @@
           </a:bodyPr>
           <a:lstStyle xmlns:a="http://schemas.openxmlformats.org/drawingml/2006/main"/>
           <a:p xmlns:a="http://schemas.openxmlformats.org/drawingml/2006/main">
-            <a:pPr algn="r">
+            <a:pPr algn="r" marL="0" indent="0">
               <a:lnSpc>
                 <a:spcPct val="112000"/>
               </a:lnSpc>
@@ -16709,7 +16930,7 @@
           </a:bodyPr>
           <a:lstStyle xmlns:a="http://schemas.openxmlformats.org/drawingml/2006/main"/>
           <a:p xmlns:a="http://schemas.openxmlformats.org/drawingml/2006/main">
-            <a:pPr algn="l">
+            <a:pPr algn="l" marL="0" indent="0">
               <a:lnSpc>
                 <a:spcPct val="112000"/>
               </a:lnSpc>
@@ -16935,7 +17156,7 @@
             </a:lvl9pPr>
           </a:lstStyle>
           <a:p xmlns:a="http://schemas.openxmlformats.org/drawingml/2006/main">
-            <a:pPr algn="l">
+            <a:pPr algn="l" marL="0" indent="0">
               <a:lnSpc>
                 <a:spcPct val="112000"/>
               </a:lnSpc>
@@ -16990,6 +17211,7 @@
           <a:bodyPr xmlns:a="http://schemas.openxmlformats.org/drawingml/2006/main"/>
           <a:lstStyle xmlns:a="http://schemas.openxmlformats.org/drawingml/2006/main"/>
           <a:p xmlns:a="http://schemas.openxmlformats.org/drawingml/2006/main">
+            <a:pPr marL="0" indent="0"/>
             <a:endParaRPr sz="1100"/>
           </a:p>
         </p:txBody>
@@ -17027,7 +17249,7 @@
           </a:bodyPr>
           <a:lstStyle xmlns:a="http://schemas.openxmlformats.org/drawingml/2006/main"/>
           <a:p xmlns:a="http://schemas.openxmlformats.org/drawingml/2006/main">
-            <a:pPr algn="l">
+            <a:pPr algn="l" marL="0" indent="0">
               <a:lnSpc>
                 <a:spcPct val="112000"/>
               </a:lnSpc>
@@ -17941,7 +18163,7 @@
           </a:bodyPr>
           <a:lstStyle xmlns:a="http://schemas.openxmlformats.org/drawingml/2006/main"/>
           <a:p xmlns:a="http://schemas.openxmlformats.org/drawingml/2006/main">
-            <a:pPr algn="l">
+            <a:pPr algn="l" marL="0" indent="0">
               <a:lnSpc>
                 <a:spcPct val="112000"/>
               </a:lnSpc>
@@ -18008,7 +18230,7 @@
           </a:bodyPr>
           <a:lstStyle xmlns:a="http://schemas.openxmlformats.org/drawingml/2006/main"/>
           <a:p xmlns:a="http://schemas.openxmlformats.org/drawingml/2006/main">
-            <a:pPr algn="l">
+            <a:pPr algn="l" marL="0" indent="0">
               <a:lnSpc>
                 <a:spcPct val="112000"/>
               </a:lnSpc>
@@ -18041,7 +18263,7 @@
             </a:r>
           </a:p>
           <a:p xmlns:a="http://schemas.openxmlformats.org/drawingml/2006/main">
-            <a:pPr algn="l">
+            <a:pPr algn="l" marL="0" indent="0">
               <a:lnSpc>
                 <a:spcPct val="112000"/>
               </a:lnSpc>
@@ -18070,7 +18292,7 @@
                 <a:ea typeface="Roboto"/>
                 <a:cs typeface="Roboto"/>
               </a:rPr>
-              <a:t>S = сумма трёх блоков: открытое предпочтение команды, не универсальный «лучший».</a:t>
+              <a:t>S — сумма трёх нормированных блоков.</a:t>
             </a:r>
           </a:p>
         </p:txBody>
@@ -18108,7 +18330,7 @@
           </a:bodyPr>
           <a:lstStyle xmlns:a="http://schemas.openxmlformats.org/drawingml/2006/main"/>
           <a:p xmlns:a="http://schemas.openxmlformats.org/drawingml/2006/main">
-            <a:pPr algn="l">
+            <a:pPr algn="l" marL="0" indent="0">
               <a:lnSpc>
                 <a:spcPct val="112000"/>
               </a:lnSpc>
@@ -18137,7 +18359,7 @@
                 <a:ea typeface="Roboto"/>
                 <a:cs typeface="Roboto"/>
               </a:rPr>
-              <a:t>¹ До лимита STRESS, млн руб. · D1 и D3 — отдельные прогоны. Полный состав альтернатив — в заметках.</a:t>
+              <a:t>¹ До лимита STRESS, млн руб. · D1 и D3 — отдельные прогоны.</a:t>
             </a:r>
           </a:p>
         </p:txBody>
@@ -18183,7 +18405,7 @@
         <p:spPr>
           <a:xfrm xmlns:a="http://schemas.openxmlformats.org/drawingml/2006/main">
             <a:off x="390525" y="2133600"/>
-            <a:ext cx="5534025" cy="3371850"/>
+            <a:ext cx="5534025" cy="2331720"/>
           </a:xfrm>
           <a:prstGeom xmlns:a="http://schemas.openxmlformats.org/drawingml/2006/main" prst="rect">
             <a:avLst/>
@@ -18195,7 +18417,7 @@
           </a:bodyPr>
           <a:lstStyle xmlns:a="http://schemas.openxmlformats.org/drawingml/2006/main"/>
           <a:p xmlns:a="http://schemas.openxmlformats.org/drawingml/2006/main">
-            <a:pPr algn="l">
+            <a:pPr algn="l" marL="0" indent="0">
               <a:lnSpc>
                 <a:spcPct val="112000"/>
               </a:lnSpc>
@@ -18224,11 +18446,11 @@
                 <a:ea typeface="Roboto"/>
                 <a:cs typeface="Roboto"/>
               </a:rPr>
-              <a:t>Повторно используем приём данных</a:t>
-            </a:r>
-          </a:p>
-          <a:p xmlns:a="http://schemas.openxmlformats.org/drawingml/2006/main">
-            <a:pPr algn="l">
+              <a:t>Общий приём и первичная обработка.</a:t>
+            </a:r>
+          </a:p>
+          <a:p xmlns:a="http://schemas.openxmlformats.org/drawingml/2006/main">
+            <a:pPr algn="l" marL="0" indent="0">
               <a:lnSpc>
                 <a:spcPct val="112000"/>
               </a:lnSpc>
@@ -18257,11 +18479,11 @@
                 <a:ea typeface="Roboto"/>
                 <a:cs typeface="Roboto"/>
               </a:rPr>
-              <a:t>и первичную обработку.</a:t>
-            </a:r>
-          </a:p>
-          <a:p xmlns:a="http://schemas.openxmlformats.org/drawingml/2006/main">
-            <a:pPr algn="l">
+              <a:t>Карты, пороги и интеграции —</a:t>
+            </a:r>
+          </a:p>
+          <a:p xmlns:a="http://schemas.openxmlformats.org/drawingml/2006/main">
+            <a:pPr algn="l" marL="0" indent="0">
               <a:lnSpc>
                 <a:spcPct val="112000"/>
               </a:lnSpc>
@@ -18290,11 +18512,11 @@
                 <a:ea typeface="Roboto"/>
                 <a:cs typeface="Roboto"/>
               </a:rPr>
-              <a:t>Карты, пороги тревог и интеграции</a:t>
-            </a:r>
-          </a:p>
-          <a:p xmlns:a="http://schemas.openxmlformats.org/drawingml/2006/main">
-            <a:pPr algn="l">
+              <a:t>локальные.</a:t>
+            </a:r>
+          </a:p>
+          <a:p xmlns:a="http://schemas.openxmlformats.org/drawingml/2006/main">
+            <a:pPr algn="l" marL="0" indent="0">
               <a:lnSpc>
                 <a:spcPct val="112000"/>
               </a:lnSpc>
@@ -18323,11 +18545,11 @@
                 <a:ea typeface="Roboto"/>
                 <a:cs typeface="Roboto"/>
               </a:rPr>
-              <a:t>со службами остаются локальными.</a:t>
-            </a:r>
-          </a:p>
-          <a:p xmlns:a="http://schemas.openxmlformats.org/drawingml/2006/main">
-            <a:pPr algn="l">
+              <a:t>Допуск: ≥ 2 лота с общей группой.</a:t>
+            </a:r>
+          </a:p>
+          <a:p xmlns:a="http://schemas.openxmlformats.org/drawingml/2006/main">
+            <a:pPr algn="l" marL="0" indent="0">
               <a:lnSpc>
                 <a:spcPct val="112000"/>
               </a:lnSpc>
@@ -18356,11 +18578,11 @@
                 <a:ea typeface="Roboto"/>
                 <a:cs typeface="Roboto"/>
               </a:rPr>
-              <a:t>Допуск: ≥ 2 лота в D3 с общей группой.</a:t>
-            </a:r>
-          </a:p>
-          <a:p xmlns:a="http://schemas.openxmlformats.org/drawingml/2006/main">
-            <a:pPr algn="l">
+              <a:t>Совпадения EO недостаточно: нужны</a:t>
+            </a:r>
+          </a:p>
+          <a:p xmlns:a="http://schemas.openxmlformats.org/drawingml/2006/main">
+            <a:pPr algn="l" marL="0" indent="0">
               <a:lnSpc>
                 <a:spcPct val="112000"/>
               </a:lnSpc>
@@ -18389,11 +18611,11 @@
                 <a:ea typeface="Roboto"/>
                 <a:cs typeface="Roboto"/>
               </a:rPr>
-              <a:t>Совпадения EO недостаточно:</a:t>
-            </a:r>
-          </a:p>
-          <a:p xmlns:a="http://schemas.openxmlformats.org/drawingml/2006/main">
-            <a:pPr algn="l">
+              <a:t>совместимые требования и смета.</a:t>
+            </a:r>
+          </a:p>
+          <a:p xmlns:a="http://schemas.openxmlformats.org/drawingml/2006/main">
+            <a:pPr algn="l" marL="0" indent="0">
               <a:lnSpc>
                 <a:spcPct val="112000"/>
               </a:lnSpc>
@@ -18422,11 +18644,11 @@
                 <a:ea typeface="Roboto"/>
                 <a:cs typeface="Roboto"/>
               </a:rPr>
-              <a:t>нужны совместимые требования,</a:t>
-            </a:r>
-          </a:p>
-          <a:p xmlns:a="http://schemas.openxmlformats.org/drawingml/2006/main">
-            <a:pPr algn="l">
+              <a:t/>
+            </a:r>
+          </a:p>
+          <a:p xmlns:a="http://schemas.openxmlformats.org/drawingml/2006/main">
+            <a:pPr algn="l" marL="0" indent="0">
               <a:lnSpc>
                 <a:spcPct val="112000"/>
               </a:lnSpc>
@@ -18455,7 +18677,7 @@
                 <a:ea typeface="Roboto"/>
                 <a:cs typeface="Roboto"/>
               </a:rPr>
-              <a:t>сравнительная смета и распределение затрат.</a:t>
+              <a:t/>
             </a:r>
           </a:p>
         </p:txBody>
@@ -18491,7 +18713,7 @@
           </a:bodyPr>
           <a:lstStyle xmlns:a="http://schemas.openxmlformats.org/drawingml/2006/main"/>
           <a:p xmlns:a="http://schemas.openxmlformats.org/drawingml/2006/main">
-            <a:pPr algn="r">
+            <a:pPr algn="r" marL="0" indent="0">
               <a:lnSpc>
                 <a:spcPct val="112000"/>
               </a:lnSpc>
@@ -18556,7 +18778,7 @@
           </a:bodyPr>
           <a:lstStyle xmlns:a="http://schemas.openxmlformats.org/drawingml/2006/main"/>
           <a:p xmlns:a="http://schemas.openxmlformats.org/drawingml/2006/main">
-            <a:pPr algn="l">
+            <a:pPr algn="l" marL="0" indent="0">
               <a:lnSpc>
                 <a:spcPct val="112000"/>
               </a:lnSpc>
@@ -18607,7 +18829,7 @@
         <p:spPr>
           <a:xfrm xmlns:a="http://schemas.openxmlformats.org/drawingml/2006/main">
             <a:off x="6257925" y="2133600"/>
-            <a:ext cx="5534025" cy="3371850"/>
+            <a:ext cx="5534025" cy="2331720"/>
           </a:xfrm>
           <a:prstGeom xmlns:a="http://schemas.openxmlformats.org/drawingml/2006/main" prst="rect">
             <a:avLst/>
@@ -18782,7 +19004,7 @@
             </a:lvl9pPr>
           </a:lstStyle>
           <a:p xmlns:a="http://schemas.openxmlformats.org/drawingml/2006/main">
-            <a:pPr algn="l">
+            <a:pPr algn="l" marL="0" indent="0">
               <a:lnSpc>
                 <a:spcPct val="112000"/>
               </a:lnSpc>
@@ -18815,7 +19037,7 @@
             </a:r>
           </a:p>
           <a:p xmlns:a="http://schemas.openxmlformats.org/drawingml/2006/main">
-            <a:pPr algn="l">
+            <a:pPr algn="l" marL="0" indent="0">
               <a:lnSpc>
                 <a:spcPct val="112000"/>
               </a:lnSpc>
@@ -18844,11 +19066,33 @@
                 <a:ea typeface="Roboto"/>
                 <a:cs typeface="Roboto"/>
               </a:rPr>
-              <a:t>kC0 = 1,05 × (1 − 0,20 × 0,30) + 0,02</a:t>
-            </a:r>
-          </a:p>
-          <a:p xmlns:a="http://schemas.openxmlformats.org/drawingml/2006/main">
-            <a:pPr algn="l">
+              <a:t>kC0 = 1,05 × (1 − 0,20 × 0,30) + 0,02 = 1,007</a:t>
+            </a:r>
+            <a:r>
+              <a:rPr sz="1725" baseline="-25000">
+                <a:solidFill>
+                  <a:srgbClr val="17212F"/>
+                </a:solidFill>
+                <a:latin typeface="Roboto"/>
+                <a:ea typeface="Roboto"/>
+                <a:cs typeface="Roboto"/>
+              </a:rPr>
+              <a:t/>
+            </a:r>
+            <a:r>
+              <a:rPr sz="1725">
+                <a:solidFill>
+                  <a:srgbClr val="17212F"/>
+                </a:solidFill>
+                <a:latin typeface="Roboto"/>
+                <a:ea typeface="Roboto"/>
+                <a:cs typeface="Roboto"/>
+              </a:rPr>
+              <a:t/>
+            </a:r>
+          </a:p>
+          <a:p xmlns:a="http://schemas.openxmlformats.org/drawingml/2006/main">
+            <a:pPr algn="l" marL="0" indent="0">
               <a:lnSpc>
                 <a:spcPct val="112000"/>
               </a:lnSpc>
@@ -18877,11 +19121,11 @@
                 <a:ea typeface="Roboto"/>
                 <a:cs typeface="Roboto"/>
               </a:rPr>
-              <a:t>          = 1,007</a:t>
-            </a:r>
-          </a:p>
-          <a:p xmlns:a="http://schemas.openxmlformats.org/drawingml/2006/main">
-            <a:pPr algn="l">
+              <a:t/>
+            </a:r>
+          </a:p>
+          <a:p xmlns:a="http://schemas.openxmlformats.org/drawingml/2006/main">
+            <a:pPr algn="l" marL="0" indent="0">
               <a:lnSpc>
                 <a:spcPct val="112000"/>
               </a:lnSpc>
@@ -18910,11 +19154,33 @@
                 <a:ea typeface="Roboto"/>
                 <a:cs typeface="Roboto"/>
               </a:rPr>
-              <a:t>kOPEX = 1,05 × (1 − 0,25 × 0,20) + 0,02</a:t>
-            </a:r>
-          </a:p>
-          <a:p xmlns:a="http://schemas.openxmlformats.org/drawingml/2006/main">
-            <a:pPr algn="l">
+              <a:t>kOPEX = 1,05 × (1 − 0,25 × 0,20) + 0,02 = 1,0175</a:t>
+            </a:r>
+            <a:r>
+              <a:rPr sz="1725" baseline="-25000">
+                <a:solidFill>
+                  <a:srgbClr val="17212F"/>
+                </a:solidFill>
+                <a:latin typeface="Roboto"/>
+                <a:ea typeface="Roboto"/>
+                <a:cs typeface="Roboto"/>
+              </a:rPr>
+              <a:t/>
+            </a:r>
+            <a:r>
+              <a:rPr sz="1725">
+                <a:solidFill>
+                  <a:srgbClr val="17212F"/>
+                </a:solidFill>
+                <a:latin typeface="Roboto"/>
+                <a:ea typeface="Roboto"/>
+                <a:cs typeface="Roboto"/>
+              </a:rPr>
+              <a:t/>
+            </a:r>
+          </a:p>
+          <a:p xmlns:a="http://schemas.openxmlformats.org/drawingml/2006/main">
+            <a:pPr algn="l" marL="0" indent="0">
               <a:lnSpc>
                 <a:spcPct val="112000"/>
               </a:lnSpc>
@@ -18943,11 +19209,11 @@
                 <a:ea typeface="Roboto"/>
                 <a:cs typeface="Roboto"/>
               </a:rPr>
-              <a:t>               = 1,0175</a:t>
-            </a:r>
-          </a:p>
-          <a:p xmlns:a="http://schemas.openxmlformats.org/drawingml/2006/main">
-            <a:pPr algn="l">
+              <a:t/>
+            </a:r>
+          </a:p>
+          <a:p xmlns:a="http://schemas.openxmlformats.org/drawingml/2006/main">
+            <a:pPr algn="l" marL="0" indent="0">
               <a:lnSpc>
                 <a:spcPct val="112000"/>
               </a:lnSpc>
@@ -18976,11 +19242,11 @@
                 <a:ea typeface="Roboto"/>
                 <a:cs typeface="Roboto"/>
               </a:rPr>
-              <a:t>Остальные коэффициенты: 1 · 1 · 0,25</a:t>
-            </a:r>
-          </a:p>
-          <a:p xmlns:a="http://schemas.openxmlformats.org/drawingml/2006/main">
-            <a:pPr algn="l">
+              <a:t>Остальные: 1 · 1 · 0,25 — ядро сохранено.</a:t>
+            </a:r>
+          </a:p>
+          <a:p xmlns:a="http://schemas.openxmlformats.org/drawingml/2006/main">
+            <a:pPr algn="l" marL="0" indent="0">
               <a:lnSpc>
                 <a:spcPct val="112000"/>
               </a:lnSpc>
@@ -19009,7 +19275,7 @@
                 <a:ea typeface="Roboto"/>
                 <a:cs typeface="Roboto"/>
               </a:rPr>
-              <a:t>VPUB · anchor · commercial; ядро сохранено.</a:t>
+              <a:t/>
             </a:r>
           </a:p>
         </p:txBody>
@@ -19035,6 +19301,7 @@
           <a:bodyPr xmlns:a="http://schemas.openxmlformats.org/drawingml/2006/main"/>
           <a:lstStyle xmlns:a="http://schemas.openxmlformats.org/drawingml/2006/main"/>
           <a:p xmlns:a="http://schemas.openxmlformats.org/drawingml/2006/main">
+            <a:pPr marL="0" indent="0"/>
             <a:endParaRPr sz="1100"/>
           </a:p>
         </p:txBody>
@@ -19231,7 +19498,7 @@
             </a:lvl9pPr>
           </a:lstStyle>
           <a:p xmlns:a="http://schemas.openxmlformats.org/drawingml/2006/main">
-            <a:pPr algn="l">
+            <a:pPr algn="l" marL="0" indent="0">
               <a:lnSpc>
                 <a:spcPct val="112000"/>
               </a:lnSpc>
@@ -19281,7 +19548,7 @@
         </p:nvSpPr>
         <p:spPr>
           <a:xfrm xmlns:a="http://schemas.openxmlformats.org/drawingml/2006/main">
-            <a:off x="390525" y="5734050"/>
+            <a:off x="390525" y="5074920"/>
             <a:ext cx="11401425" cy="371475"/>
           </a:xfrm>
           <a:prstGeom xmlns:a="http://schemas.openxmlformats.org/drawingml/2006/main" prst="rect">
@@ -19298,7 +19565,7 @@
           </a:bodyPr>
           <a:lstStyle xmlns:a="http://schemas.openxmlformats.org/drawingml/2006/main"/>
           <a:p xmlns:a="http://schemas.openxmlformats.org/drawingml/2006/main">
-            <a:pPr algn="l">
+            <a:pPr algn="l" marL="0" indent="0">
               <a:lnSpc>
                 <a:spcPct val="112000"/>
               </a:lnSpc>
@@ -19327,7 +19594,7 @@
                 <a:ea typeface="Roboto"/>
                 <a:cs typeface="Roboto"/>
               </a:rPr>
-              <a:t>Против A: −25,8 млн C0 и −5,2 млн OPEX/год. Экономия подлежит подтверждению.</a:t>
+              <a:t>Против A: −25,8 млн C0 и −5,2 млн OPEX/год.</a:t>
             </a:r>
           </a:p>
         </p:txBody>
@@ -19365,7 +19632,7 @@
           </a:bodyPr>
           <a:lstStyle xmlns:a="http://schemas.openxmlformats.org/drawingml/2006/main"/>
           <a:p xmlns:a="http://schemas.openxmlformats.org/drawingml/2006/main">
-            <a:pPr algn="l">
+            <a:pPr algn="l" marL="0" indent="0">
               <a:lnSpc>
                 <a:spcPct val="112000"/>
               </a:lnSpc>
@@ -19452,7 +19719,7 @@
           </a:bodyPr>
           <a:lstStyle xmlns:a="http://schemas.openxmlformats.org/drawingml/2006/main"/>
           <a:p xmlns:a="http://schemas.openxmlformats.org/drawingml/2006/main">
-            <a:pPr algn="r">
+            <a:pPr algn="r" marL="0" indent="0">
               <a:lnSpc>
                 <a:spcPct val="112000"/>
               </a:lnSpc>
@@ -19517,7 +19784,7 @@
           </a:bodyPr>
           <a:lstStyle xmlns:a="http://schemas.openxmlformats.org/drawingml/2006/main"/>
           <a:p xmlns:a="http://schemas.openxmlformats.org/drawingml/2006/main">
-            <a:pPr algn="l">
+            <a:pPr algn="l" marL="0" indent="0">
               <a:lnSpc>
                 <a:spcPct val="112000"/>
               </a:lnSpc>
@@ -19572,6 +19839,7 @@
           <a:bodyPr xmlns:a="http://schemas.openxmlformats.org/drawingml/2006/main"/>
           <a:lstStyle xmlns:a="http://schemas.openxmlformats.org/drawingml/2006/main"/>
           <a:p xmlns:a="http://schemas.openxmlformats.org/drawingml/2006/main">
+            <a:pPr marL="0" indent="0"/>
             <a:endParaRPr sz="1100"/>
           </a:p>
         </p:txBody>
@@ -19627,7 +19895,7 @@
           <a:bodyPr xmlns:a="http://schemas.openxmlformats.org/drawingml/2006/main" anchor="ctr"/>
           <a:lstStyle xmlns:a="http://schemas.openxmlformats.org/drawingml/2006/main"/>
           <a:p xmlns:a="http://schemas.openxmlformats.org/drawingml/2006/main">
-            <a:pPr algn="ctr">
+            <a:pPr algn="ctr" marL="0" indent="0">
               <a:buNone/>
             </a:pPr>
             <a:endParaRPr>
@@ -19689,7 +19957,7 @@
           <a:bodyPr xmlns:a="http://schemas.openxmlformats.org/drawingml/2006/main" anchor="ctr"/>
           <a:lstStyle xmlns:a="http://schemas.openxmlformats.org/drawingml/2006/main"/>
           <a:p xmlns:a="http://schemas.openxmlformats.org/drawingml/2006/main">
-            <a:pPr algn="ctr">
+            <a:pPr algn="ctr" marL="0" indent="0">
               <a:buNone/>
             </a:pPr>
             <a:endParaRPr>
@@ -19892,7 +20160,7 @@
             </a:lvl9pPr>
           </a:lstStyle>
           <a:p xmlns:a="http://schemas.openxmlformats.org/drawingml/2006/main">
-            <a:pPr algn="l">
+            <a:pPr algn="l" marL="0" indent="0">
               <a:lnSpc>
                 <a:spcPct val="112000"/>
               </a:lnSpc>
@@ -19925,7 +20193,7 @@
             </a:r>
           </a:p>
           <a:p xmlns:a="http://schemas.openxmlformats.org/drawingml/2006/main">
-            <a:pPr algn="l">
+            <a:pPr algn="l" marL="0" indent="0">
               <a:lnSpc>
                 <a:spcPct val="112000"/>
               </a:lnSpc>
@@ -19958,7 +20226,7 @@
             </a:r>
           </a:p>
           <a:p xmlns:a="http://schemas.openxmlformats.org/drawingml/2006/main">
-            <a:pPr algn="l">
+            <a:pPr algn="l" marL="0" indent="0">
               <a:lnSpc>
                 <a:spcPct val="112000"/>
               </a:lnSpc>
@@ -19987,7 +20255,7 @@
                 <a:ea typeface="Roboto"/>
                 <a:cs typeface="Roboto"/>
               </a:rPr>
-              <a:t>Остаток за год ≠ возврат капитала.</a:t>
+              <a:t>Остаток за год не равен возврату капитала.</a:t>
             </a:r>
           </a:p>
         </p:txBody>
@@ -20022,7 +20290,7 @@
           </a:bodyPr>
           <a:lstStyle xmlns:a="http://schemas.openxmlformats.org/drawingml/2006/main"/>
           <a:p xmlns:a="http://schemas.openxmlformats.org/drawingml/2006/main">
-            <a:pPr algn="l">
+            <a:pPr algn="l" marL="0" indent="0">
               <a:lnSpc>
                 <a:spcPct val="112000"/>
               </a:lnSpc>
@@ -20248,7 +20516,7 @@
             </a:lvl9pPr>
           </a:lstStyle>
           <a:p xmlns:a="http://schemas.openxmlformats.org/drawingml/2006/main">
-            <a:pPr algn="l">
+            <a:pPr algn="l" marL="0" indent="0">
               <a:lnSpc>
                 <a:spcPct val="112000"/>
               </a:lnSpc>
@@ -20281,7 +20549,7 @@
             </a:r>
           </a:p>
           <a:p xmlns:a="http://schemas.openxmlformats.org/drawingml/2006/main">
-            <a:pPr algn="l">
+            <a:pPr algn="l" marL="0" indent="0">
               <a:lnSpc>
                 <a:spcPct val="112000"/>
               </a:lnSpc>
@@ -20310,11 +20578,11 @@
                 <a:ea typeface="Roboto"/>
                 <a:cs typeface="Roboto"/>
               </a:rPr>
-              <a:t>Общественная оценка не прибавляется</a:t>
-            </a:r>
-          </a:p>
-          <a:p xmlns:a="http://schemas.openxmlformats.org/drawingml/2006/main">
-            <a:pPr algn="l">
+              <a:t>К денежным поступлениям не прибавляется.</a:t>
+            </a:r>
+          </a:p>
+          <a:p xmlns:a="http://schemas.openxmlformats.org/drawingml/2006/main">
+            <a:pPr algn="l" marL="0" indent="0">
               <a:lnSpc>
                 <a:spcPct val="112000"/>
               </a:lnSpc>
@@ -20343,7 +20611,7 @@
                 <a:ea typeface="Roboto"/>
                 <a:cs typeface="Roboto"/>
               </a:rPr>
-              <a:t>к денежным поступлениям на графике.</a:t>
+              <a:t/>
             </a:r>
           </a:p>
         </p:txBody>
@@ -20378,7 +20646,7 @@
           </a:bodyPr>
           <a:lstStyle xmlns:a="http://schemas.openxmlformats.org/drawingml/2006/main"/>
           <a:p xmlns:a="http://schemas.openxmlformats.org/drawingml/2006/main">
-            <a:pPr algn="l">
+            <a:pPr algn="l" marL="0" indent="0">
               <a:lnSpc>
                 <a:spcPct val="112000"/>
               </a:lnSpc>
@@ -20463,7 +20731,7 @@
           <a:bodyPr xmlns:a="http://schemas.openxmlformats.org/drawingml/2006/main" anchor="ctr"/>
           <a:lstStyle xmlns:a="http://schemas.openxmlformats.org/drawingml/2006/main"/>
           <a:p xmlns:a="http://schemas.openxmlformats.org/drawingml/2006/main">
-            <a:pPr algn="ctr">
+            <a:pPr algn="ctr" marL="0" indent="0">
               <a:buNone/>
             </a:pPr>
             <a:endParaRPr>
@@ -20666,7 +20934,7 @@
             </a:lvl9pPr>
           </a:lstStyle>
           <a:p xmlns:a="http://schemas.openxmlformats.org/drawingml/2006/main">
-            <a:pPr algn="l">
+            <a:pPr algn="l" marL="0" indent="0">
               <a:lnSpc>
                 <a:spcPct val="112000"/>
               </a:lnSpc>
@@ -20695,11 +20963,11 @@
                 <a:ea typeface="Roboto"/>
                 <a:cs typeface="Roboto"/>
               </a:rPr>
-              <a:t>Предлагается полный капитальный</a:t>
-            </a:r>
-          </a:p>
-          <a:p xmlns:a="http://schemas.openxmlformats.org/drawingml/2006/main">
-            <a:pPr algn="l">
+              <a:t>Капитальный грант или целевой</a:t>
+            </a:r>
+          </a:p>
+          <a:p xmlns:a="http://schemas.openxmlformats.org/drawingml/2006/main">
+            <a:pPr algn="l" marL="0" indent="0">
               <a:lnSpc>
                 <a:spcPct val="112000"/>
               </a:lnSpc>
@@ -20728,11 +20996,11 @@
                 <a:ea typeface="Roboto"/>
                 <a:cs typeface="Roboto"/>
               </a:rPr>
-              <a:t>грант / целевой трансферт заказчика.</a:t>
-            </a:r>
-          </a:p>
-          <a:p xmlns:a="http://schemas.openxmlformats.org/drawingml/2006/main">
-            <a:pPr algn="l">
+              <a:t>трансферт заказчика.</a:t>
+            </a:r>
+          </a:p>
+          <a:p xmlns:a="http://schemas.openxmlformats.org/drawingml/2006/main">
+            <a:pPr algn="l" marL="0" indent="0">
               <a:lnSpc>
                 <a:spcPct val="112000"/>
               </a:lnSpc>
@@ -20761,7 +21029,7 @@
                 <a:ea typeface="Roboto"/>
                 <a:cs typeface="Roboto"/>
               </a:rPr>
-              <a:t>Это схема, не подтверждённое выделение.</a:t>
+              <a:t/>
             </a:r>
           </a:p>
         </p:txBody>
@@ -20796,7 +21064,7 @@
           </a:bodyPr>
           <a:lstStyle xmlns:a="http://schemas.openxmlformats.org/drawingml/2006/main"/>
           <a:p xmlns:a="http://schemas.openxmlformats.org/drawingml/2006/main">
-            <a:pPr algn="l">
+            <a:pPr algn="l" marL="0" indent="0">
               <a:lnSpc>
                 <a:spcPct val="112000"/>
               </a:lnSpc>
@@ -20862,8 +21130,8 @@
         </p:nvSpPr>
         <p:spPr>
           <a:xfrm xmlns:a="http://schemas.openxmlformats.org/drawingml/2006/main">
-            <a:off x="390525" y="1219200"/>
-            <a:ext cx="5619750" cy="571500"/>
+            <a:off x="390525" y="1188720"/>
+            <a:ext cx="5619750" cy="329184"/>
           </a:xfrm>
           <a:prstGeom xmlns:a="http://schemas.openxmlformats.org/drawingml/2006/main" prst="rect">
             <a:avLst/>
@@ -20879,40 +21147,7 @@
           </a:bodyPr>
           <a:lstStyle xmlns:a="http://schemas.openxmlformats.org/drawingml/2006/main"/>
           <a:p xmlns:a="http://schemas.openxmlformats.org/drawingml/2006/main">
-            <a:pPr algn="l">
-              <a:lnSpc>
-                <a:spcPct val="112000"/>
-              </a:lnSpc>
-              <a:spcBef>
-                <a:spcPts val="0"/>
-              </a:spcBef>
-              <a:spcAft>
-                <a:spcPts val="0"/>
-              </a:spcAft>
-              <a:buNone/>
-              <a:defRPr sz="1575" b="1">
-                <a:solidFill>
-                  <a:srgbClr val="17212F"/>
-                </a:solidFill>
-                <a:latin typeface="Roboto"/>
-                <a:ea typeface="Roboto"/>
-                <a:cs typeface="Roboto"/>
-              </a:defRPr>
-            </a:pPr>
-            <a:r>
-              <a:rPr sz="1575" b="1">
-                <a:solidFill>
-                  <a:srgbClr val="17212F"/>
-                </a:solidFill>
-                <a:latin typeface="Roboto"/>
-                <a:ea typeface="Roboto"/>
-                <a:cs typeface="Roboto"/>
-              </a:rPr>
-              <a:t>398 = 163,75 якорных + 234,25 коммерческих</a:t>
-            </a:r>
-          </a:p>
-          <a:p xmlns:a="http://schemas.openxmlformats.org/drawingml/2006/main">
-            <a:pPr algn="l">
+            <a:pPr algn="l" marL="0" indent="0">
               <a:lnSpc>
                 <a:spcPct val="112000"/>
               </a:lnSpc>
@@ -20942,6 +21177,39 @@
                 <a:cs typeface="Roboto"/>
               </a:rPr>
               <a:t>Денежные потоки, млн руб. в год</a:t>
+            </a:r>
+          </a:p>
+          <a:p xmlns:a="http://schemas.openxmlformats.org/drawingml/2006/main">
+            <a:pPr algn="l" marL="0" indent="0">
+              <a:lnSpc>
+                <a:spcPct val="112000"/>
+              </a:lnSpc>
+              <a:spcBef>
+                <a:spcPts val="0"/>
+              </a:spcBef>
+              <a:spcAft>
+                <a:spcPts val="0"/>
+              </a:spcAft>
+              <a:buNone/>
+              <a:defRPr sz="1575" b="1">
+                <a:solidFill>
+                  <a:srgbClr val="17212F"/>
+                </a:solidFill>
+                <a:latin typeface="Roboto"/>
+                <a:ea typeface="Roboto"/>
+                <a:cs typeface="Roboto"/>
+              </a:defRPr>
+            </a:pPr>
+            <a:r>
+              <a:rPr sz="1575" b="1">
+                <a:solidFill>
+                  <a:srgbClr val="17212F"/>
+                </a:solidFill>
+                <a:latin typeface="Roboto"/>
+                <a:ea typeface="Roboto"/>
+                <a:cs typeface="Roboto"/>
+              </a:rPr>
+              <a:t/>
             </a:r>
           </a:p>
         </p:txBody>
@@ -20962,8 +21230,8 @@
         </p:nvSpPr>
         <p:spPr>
           <a:xfrm xmlns:a="http://schemas.openxmlformats.org/drawingml/2006/main">
-            <a:off x="390525" y="5467350"/>
-            <a:ext cx="5581650" cy="733425"/>
+            <a:off x="390525" y="5285232"/>
+            <a:ext cx="5581650" cy="960120"/>
           </a:xfrm>
           <a:prstGeom xmlns:a="http://schemas.openxmlformats.org/drawingml/2006/main" prst="rect">
             <a:avLst/>
@@ -20979,7 +21247,7 @@
           </a:bodyPr>
           <a:lstStyle xmlns:a="http://schemas.openxmlformats.org/drawingml/2006/main"/>
           <a:p xmlns:a="http://schemas.openxmlformats.org/drawingml/2006/main">
-            <a:pPr algn="l">
+            <a:pPr algn="l" marL="0" indent="0">
               <a:lnSpc>
                 <a:spcPct val="112000"/>
               </a:lnSpc>
@@ -21008,11 +21276,44 @@
                 <a:ea typeface="Roboto"/>
                 <a:cs typeface="Roboto"/>
               </a:rPr>
-              <a:t>Предлагаемые транши C0: 20% / 50% / 30%</a:t>
-            </a:r>
-          </a:p>
-          <a:p xmlns:a="http://schemas.openxmlformats.org/drawingml/2006/main">
-            <a:pPr algn="l">
+              <a:t>398 = 163,75 якорных + 234,25 коммерческих</a:t>
+            </a:r>
+          </a:p>
+          <a:p xmlns:a="http://schemas.openxmlformats.org/drawingml/2006/main">
+            <a:pPr algn="l" marL="0" indent="0">
+              <a:lnSpc>
+                <a:spcPct val="112000"/>
+              </a:lnSpc>
+              <a:spcBef>
+                <a:spcPts val="0"/>
+              </a:spcBef>
+              <a:spcAft>
+                <a:spcPts val="0"/>
+              </a:spcAft>
+              <a:buNone/>
+              <a:defRPr sz="1500" b="0">
+                <a:solidFill>
+                  <a:srgbClr val="17212F"/>
+                </a:solidFill>
+                <a:latin typeface="Roboto"/>
+                <a:ea typeface="Roboto"/>
+                <a:cs typeface="Roboto"/>
+              </a:defRPr>
+            </a:pPr>
+            <a:r>
+              <a:rPr sz="1500" b="0">
+                <a:solidFill>
+                  <a:srgbClr val="17212F"/>
+                </a:solidFill>
+                <a:latin typeface="Roboto"/>
+                <a:ea typeface="Roboto"/>
+                <a:cs typeface="Roboto"/>
+              </a:rPr>
+              <a:t>Транши C0: 20% / 50% / 30%</a:t>
+            </a:r>
+          </a:p>
+          <a:p xmlns:a="http://schemas.openxmlformats.org/drawingml/2006/main">
+            <a:pPr algn="l" marL="0" indent="0">
               <a:lnSpc>
                 <a:spcPct val="112000"/>
               </a:lnSpc>
@@ -21045,7 +21346,7 @@
             </a:r>
           </a:p>
           <a:p xmlns:a="http://schemas.openxmlformats.org/drawingml/2006/main">
-            <a:pPr algn="l">
+            <a:pPr algn="l" marL="0" indent="0">
               <a:lnSpc>
                 <a:spcPct val="112000"/>
               </a:lnSpc>
@@ -21074,7 +21375,7 @@
                 <a:ea typeface="Roboto"/>
                 <a:cs typeface="Roboto"/>
               </a:rPr>
-              <a:t>Источник и плательщик ещё требуют согласования.</a:t>
+              <a:t/>
             </a:r>
           </a:p>
         </p:txBody>
@@ -21112,7 +21413,7 @@
           </a:bodyPr>
           <a:lstStyle xmlns:a="http://schemas.openxmlformats.org/drawingml/2006/main"/>
           <a:p xmlns:a="http://schemas.openxmlformats.org/drawingml/2006/main">
-            <a:pPr algn="l">
+            <a:pPr algn="l" marL="0" indent="0">
               <a:lnSpc>
                 <a:spcPct val="112000"/>
               </a:lnSpc>
@@ -21141,7 +21442,40 @@
                 <a:ea typeface="Roboto"/>
                 <a:cs typeface="Roboto"/>
               </a:rPr>
-              <a:t>П3 · Годовой остаток 97,45 млн руб.; kcash 1,324. Капитальный и эксплуатационный бюджеты разделены.</a:t>
+              <a:t>П3 · Годовой остаток 97,45 млн руб.; </a:t>
+            </a:r>
+            <a:r>
+              <a:rPr sz="1050" b="0">
+                <a:solidFill>
+                  <a:srgbClr val="536172"/>
+                </a:solidFill>
+                <a:latin typeface="Roboto"/>
+                <a:ea typeface="Roboto"/>
+                <a:cs typeface="Roboto"/>
+              </a:rPr>
+              <a:t>k</a:t>
+            </a:r>
+            <a:r>
+              <a:rPr sz="1050" b="0" baseline="-25000">
+                <a:solidFill>
+                  <a:srgbClr val="536172"/>
+                </a:solidFill>
+                <a:latin typeface="Roboto"/>
+                <a:ea typeface="Roboto"/>
+                <a:cs typeface="Roboto"/>
+              </a:rPr>
+              <a:t>cash</a:t>
+            </a:r>
+            <a:r>
+              <a:rPr sz="1050" b="0">
+                <a:solidFill>
+                  <a:srgbClr val="536172"/>
+                </a:solidFill>
+                <a:latin typeface="Roboto"/>
+                <a:ea typeface="Roboto"/>
+                <a:cs typeface="Roboto"/>
+              </a:rPr>
+              <a:t> 1,324. Капитальный и эксплуатационный бюджеты разделены.</a:t>
             </a:r>
           </a:p>
         </p:txBody>
@@ -21199,7 +21533,7 @@
           </a:bodyPr>
           <a:lstStyle xmlns:a="http://schemas.openxmlformats.org/drawingml/2006/main"/>
           <a:p xmlns:a="http://schemas.openxmlformats.org/drawingml/2006/main">
-            <a:pPr algn="l">
+            <a:pPr algn="l" marL="0" indent="0">
               <a:lnSpc>
                 <a:spcPct val="112000"/>
               </a:lnSpc>
@@ -21228,11 +21562,11 @@
                 <a:ea typeface="Roboto"/>
                 <a:cs typeface="Roboto"/>
               </a:rPr>
-              <a:t>Заказчик закупает общий EO-сервис.</a:t>
-            </a:r>
-          </a:p>
-          <a:p xmlns:a="http://schemas.openxmlformats.org/drawingml/2006/main">
-            <a:pPr algn="l">
+              <a:t>Заказчик закупает, оператор поставляет,</a:t>
+            </a:r>
+          </a:p>
+          <a:p xmlns:a="http://schemas.openxmlformats.org/drawingml/2006/main">
+            <a:pPr algn="l" marL="0" indent="0">
               <a:lnSpc>
                 <a:spcPct val="112000"/>
               </a:lnSpc>
@@ -21261,11 +21595,11 @@
                 <a:ea typeface="Roboto"/>
                 <a:cs typeface="Roboto"/>
               </a:rPr>
-              <a:t>Оператор поставляет; профильные службы</a:t>
-            </a:r>
-          </a:p>
-          <a:p xmlns:a="http://schemas.openxmlformats.org/drawingml/2006/main">
-            <a:pPr algn="l">
+              <a:t>службы принимают.</a:t>
+            </a:r>
+          </a:p>
+          <a:p xmlns:a="http://schemas.openxmlformats.org/drawingml/2006/main">
+            <a:pPr algn="l" marL="0" indent="0">
               <a:lnSpc>
                 <a:spcPct val="112000"/>
               </a:lnSpc>
@@ -21294,11 +21628,11 @@
                 <a:ea typeface="Roboto"/>
                 <a:cs typeface="Roboto"/>
               </a:rPr>
-              <a:t>и заказчик принимают результат.</a:t>
-            </a:r>
-          </a:p>
-          <a:p xmlns:a="http://schemas.openxmlformats.org/drawingml/2006/main">
-            <a:pPr algn="l">
+              <a:t>Общественный слой бесплатный</a:t>
+            </a:r>
+          </a:p>
+          <a:p xmlns:a="http://schemas.openxmlformats.org/drawingml/2006/main">
+            <a:pPr algn="l" marL="0" indent="0">
               <a:lnSpc>
                 <a:spcPct val="112000"/>
               </a:lnSpc>
@@ -21327,11 +21661,11 @@
                 <a:ea typeface="Roboto"/>
                 <a:cs typeface="Roboto"/>
               </a:rPr>
-              <a:t>Общественный слой бесплатный,</a:t>
-            </a:r>
-          </a:p>
-          <a:p xmlns:a="http://schemas.openxmlformats.org/drawingml/2006/main">
-            <a:pPr algn="l">
+              <a:t>и недискриминационный.</a:t>
+            </a:r>
+          </a:p>
+          <a:p xmlns:a="http://schemas.openxmlformats.org/drawingml/2006/main">
+            <a:pPr algn="l" marL="0" indent="0">
               <a:lnSpc>
                 <a:spcPct val="112000"/>
               </a:lnSpc>
@@ -21360,7 +21694,7 @@
                 <a:ea typeface="Roboto"/>
                 <a:cs typeface="Roboto"/>
               </a:rPr>
-              <a:t>своевременный и недискриминационный.</a:t>
+              <a:t/>
             </a:r>
           </a:p>
         </p:txBody>
@@ -21396,7 +21730,7 @@
           </a:bodyPr>
           <a:lstStyle xmlns:a="http://schemas.openxmlformats.org/drawingml/2006/main"/>
           <a:p xmlns:a="http://schemas.openxmlformats.org/drawingml/2006/main">
-            <a:pPr algn="r">
+            <a:pPr algn="r" marL="0" indent="0">
               <a:lnSpc>
                 <a:spcPct val="112000"/>
               </a:lnSpc>
@@ -21451,6 +21785,7 @@
           <a:bodyPr xmlns:a="http://schemas.openxmlformats.org/drawingml/2006/main"/>
           <a:lstStyle xmlns:a="http://schemas.openxmlformats.org/drawingml/2006/main"/>
           <a:p xmlns:a="http://schemas.openxmlformats.org/drawingml/2006/main">
+            <a:pPr marL="0" indent="0"/>
             <a:endParaRPr sz="1100"/>
           </a:p>
         </p:txBody>
@@ -21647,7 +21982,7 @@
             </a:lvl9pPr>
           </a:lstStyle>
           <a:p xmlns:a="http://schemas.openxmlformats.org/drawingml/2006/main">
-            <a:pPr algn="l">
+            <a:pPr algn="l" marL="0" indent="0">
               <a:lnSpc>
                 <a:spcPct val="112000"/>
               </a:lnSpc>
@@ -21873,7 +22208,7 @@
             </a:lvl9pPr>
           </a:lstStyle>
           <a:p xmlns:a="http://schemas.openxmlformats.org/drawingml/2006/main">
-            <a:pPr algn="l">
+            <a:pPr algn="l" marL="0" indent="0">
               <a:lnSpc>
                 <a:spcPct val="112000"/>
               </a:lnSpc>
@@ -21902,11 +22237,11 @@
                 <a:ea typeface="Roboto"/>
                 <a:cs typeface="Roboto"/>
               </a:rPr>
-              <a:t>Годовую подписку оплачивает и принимает</a:t>
-            </a:r>
-          </a:p>
-          <a:p xmlns:a="http://schemas.openxmlformats.org/drawingml/2006/main">
-            <a:pPr algn="l">
+              <a:t>Годовую подписку платит пользователь.</a:t>
+            </a:r>
+          </a:p>
+          <a:p xmlns:a="http://schemas.openxmlformats.org/drawingml/2006/main">
+            <a:pPr algn="l" marL="0" indent="0">
               <a:lnSpc>
                 <a:spcPct val="112000"/>
               </a:lnSpc>
@@ -21935,11 +22270,11 @@
                 <a:ea typeface="Roboto"/>
                 <a:cs typeface="Roboto"/>
               </a:rPr>
-              <a:t>пользователь. Якорные 33,75 млн/год в C</a:t>
-            </a:r>
-          </a:p>
-          <a:p xmlns:a="http://schemas.openxmlformats.org/drawingml/2006/main">
-            <a:pPr algn="l">
+              <a:t>Плательщик якорных 33,75 млн/год</a:t>
+            </a:r>
+          </a:p>
+          <a:p xmlns:a="http://schemas.openxmlformats.org/drawingml/2006/main">
+            <a:pPr algn="l" marL="0" indent="0">
               <a:lnSpc>
                 <a:spcPct val="112000"/>
               </a:lnSpc>
@@ -21968,11 +22303,11 @@
                 <a:ea typeface="Roboto"/>
                 <a:cs typeface="Roboto"/>
               </a:rPr>
-              <a:t>требуют подтверждения плательщика.</a:t>
-            </a:r>
-          </a:p>
-          <a:p xmlns:a="http://schemas.openxmlformats.org/drawingml/2006/main">
-            <a:pPr algn="l">
+              <a:t>не определён. Бесплатного слоя нет.</a:t>
+            </a:r>
+          </a:p>
+          <a:p xmlns:a="http://schemas.openxmlformats.org/drawingml/2006/main">
+            <a:pPr algn="l" marL="0" indent="0">
               <a:lnSpc>
                 <a:spcPct val="112000"/>
               </a:lnSpc>
@@ -22001,7 +22336,7 @@
                 <a:ea typeface="Roboto"/>
                 <a:cs typeface="Roboto"/>
               </a:rPr>
-              <a:t>Обязательного бесплатного слоя нет.</a:t>
+              <a:t/>
             </a:r>
           </a:p>
         </p:txBody>
@@ -22198,7 +22533,7 @@
             </a:lvl9pPr>
           </a:lstStyle>
           <a:p xmlns:a="http://schemas.openxmlformats.org/drawingml/2006/main">
-            <a:pPr algn="l">
+            <a:pPr algn="l" marL="0" indent="0">
               <a:lnSpc>
                 <a:spcPct val="112000"/>
               </a:lnSpc>
@@ -22260,7 +22595,7 @@
           </a:bodyPr>
           <a:lstStyle xmlns:a="http://schemas.openxmlformats.org/drawingml/2006/main"/>
           <a:p xmlns:a="http://schemas.openxmlformats.org/drawingml/2006/main">
-            <a:pPr algn="l">
+            <a:pPr algn="l" marL="0" indent="0">
               <a:lnSpc>
                 <a:spcPct val="112000"/>
               </a:lnSpc>
@@ -22486,7 +22821,7 @@
             </a:lvl9pPr>
           </a:lstStyle>
           <a:p xmlns:a="http://schemas.openxmlformats.org/drawingml/2006/main">
-            <a:pPr algn="l">
+            <a:pPr algn="l" marL="0" indent="0">
               <a:lnSpc>
                 <a:spcPct val="112000"/>
               </a:lnSpc>
@@ -22515,7 +22850,7 @@
                 <a:ea typeface="Roboto"/>
                 <a:cs typeface="Roboto"/>
               </a:rPr>
-              <a:t>П5 · Предлагаемая договорная схема</a:t>
+              <a:t>П5 · Договорная схема</a:t>
             </a:r>
           </a:p>
         </p:txBody>
@@ -22564,6 +22899,12 @@
             <a:schemeClr val="tx1"/>
           </a:fontRef>
         </p:style>
+        <p:txBody xmlns:a="http://schemas.openxmlformats.org/drawingml/2006/main">
+          <a:bodyPr/>
+          <a:p>
+            <a:pPr marL="0" indent="0"/>
+          </a:p>
+        </p:txBody>
       </p:sp>
       <p:sp>
         <p:nvSpPr>
@@ -22757,7 +23098,7 @@
             </a:lvl9pPr>
           </a:lstStyle>
           <a:p xmlns:a="http://schemas.openxmlformats.org/drawingml/2006/main">
-            <a:pPr algn="l">
+            <a:pPr algn="l" marL="0" indent="0">
               <a:lnSpc>
                 <a:spcPct val="112000"/>
               </a:lnSpc>
@@ -22786,11 +23127,11 @@
                 <a:ea typeface="Roboto"/>
                 <a:cs typeface="Roboto"/>
               </a:rPr>
-              <a:t>Капитальный риск — публичный заказчик.</a:t>
-            </a:r>
-          </a:p>
-          <a:p xmlns:a="http://schemas.openxmlformats.org/drawingml/2006/main">
-            <a:pPr algn="l">
+              <a:t>Капитальный риск — заказчик.</a:t>
+            </a:r>
+          </a:p>
+          <a:p xmlns:a="http://schemas.openxmlformats.org/drawingml/2006/main">
+            <a:pPr algn="l" marL="0" indent="0">
               <a:lnSpc>
                 <a:spcPct val="112000"/>
               </a:lnSpc>
@@ -22819,11 +23160,11 @@
                 <a:ea typeface="Roboto"/>
                 <a:cs typeface="Roboto"/>
               </a:rPr>
-              <a:t>SLA и исполнение — оператор.</a:t>
-            </a:r>
-          </a:p>
-          <a:p xmlns:a="http://schemas.openxmlformats.org/drawingml/2006/main">
-            <a:pPr algn="l">
+              <a:t>SLA — оператор.</a:t>
+            </a:r>
+          </a:p>
+          <a:p xmlns:a="http://schemas.openxmlformats.org/drawingml/2006/main">
+            <a:pPr algn="l" marL="0" indent="0">
               <a:lnSpc>
                 <a:spcPct val="112000"/>
               </a:lnSpc>
@@ -22852,11 +23193,11 @@
                 <a:ea typeface="Roboto"/>
                 <a:cs typeface="Roboto"/>
               </a:rPr>
-              <a:t>Спрос на подписку — коммерческий оператор.</a:t>
-            </a:r>
-          </a:p>
-          <a:p xmlns:a="http://schemas.openxmlformats.org/drawingml/2006/main">
-            <a:pPr algn="l">
+              <a:t>Спрос — коммерческий оператор.</a:t>
+            </a:r>
+          </a:p>
+          <a:p xmlns:a="http://schemas.openxmlformats.org/drawingml/2006/main">
+            <a:pPr algn="l" marL="0" indent="0">
               <a:lnSpc>
                 <a:spcPct val="112000"/>
               </a:lnSpc>
@@ -22885,7 +23226,7 @@
                 <a:ea typeface="Roboto"/>
                 <a:cs typeface="Roboto"/>
               </a:rPr>
-              <a:t>Приёмка проверяет доступ и переносимость.</a:t>
+              <a:t/>
             </a:r>
           </a:p>
         </p:txBody>
@@ -23082,7 +23423,7 @@
             </a:lvl9pPr>
           </a:lstStyle>
           <a:p xmlns:a="http://schemas.openxmlformats.org/drawingml/2006/main">
-            <a:pPr algn="l">
+            <a:pPr algn="l" marL="0" indent="0">
               <a:lnSpc>
                 <a:spcPct val="112000"/>
               </a:lnSpc>
@@ -23171,7 +23512,7 @@
           </a:bodyPr>
           <a:lstStyle xmlns:a="http://schemas.openxmlformats.org/drawingml/2006/main"/>
           <a:p xmlns:a="http://schemas.openxmlformats.org/drawingml/2006/main">
-            <a:pPr algn="ctr">
+            <a:pPr algn="ctr" marL="0" indent="0">
               <a:lnSpc>
                 <a:spcPct val="112000"/>
               </a:lnSpc>
@@ -23235,7 +23576,7 @@
           </a:bodyPr>
           <a:lstStyle xmlns:a="http://schemas.openxmlformats.org/drawingml/2006/main"/>
           <a:p xmlns:a="http://schemas.openxmlformats.org/drawingml/2006/main">
-            <a:pPr algn="l">
+            <a:pPr algn="l" marL="0" indent="0">
               <a:lnSpc>
                 <a:spcPct val="112000"/>
               </a:lnSpc>
@@ -23264,7 +23605,7 @@
                 <a:ea typeface="Roboto"/>
                 <a:cs typeface="Roboto"/>
               </a:rPr>
-              <a:t>Предлагаемый договор: 3 года</a:t>
+              <a:t>Договор: 3 года</a:t>
             </a:r>
           </a:p>
         </p:txBody>
@@ -23461,7 +23802,7 @@
             </a:lvl9pPr>
           </a:lstStyle>
           <a:p xmlns:a="http://schemas.openxmlformats.org/drawingml/2006/main">
-            <a:pPr algn="l">
+            <a:pPr algn="l" marL="0" indent="0">
               <a:lnSpc>
                 <a:spcPct val="112000"/>
               </a:lnSpc>
@@ -23490,11 +23831,11 @@
                 <a:ea typeface="Roboto"/>
                 <a:cs typeface="Roboto"/>
               </a:rPr>
-              <a:t>Пересмотр конкурсом; экспорт данных, API</a:t>
-            </a:r>
-          </a:p>
-          <a:p xmlns:a="http://schemas.openxmlformats.org/drawingml/2006/main">
-            <a:pPr algn="l">
+              <a:t>Пересмотр конкурсом; экспорт данных</a:t>
+            </a:r>
+          </a:p>
+          <a:p xmlns:a="http://schemas.openxmlformats.org/drawingml/2006/main">
+            <a:pPr algn="l" marL="0" indent="0">
               <a:lnSpc>
                 <a:spcPct val="112000"/>
               </a:lnSpc>
@@ -23523,11 +23864,11 @@
                 <a:ea typeface="Roboto"/>
                 <a:cs typeface="Roboto"/>
               </a:rPr>
-              <a:t>и документация для смены оператора.</a:t>
-            </a:r>
-          </a:p>
-          <a:p xmlns:a="http://schemas.openxmlformats.org/drawingml/2006/main">
-            <a:pPr algn="l">
+              <a:t>и API для смены оператора.</a:t>
+            </a:r>
+          </a:p>
+          <a:p xmlns:a="http://schemas.openxmlformats.org/drawingml/2006/main">
+            <a:pPr algn="l" marL="0" indent="0">
               <a:lnSpc>
                 <a:spcPct val="112000"/>
               </a:lnSpc>
@@ -23556,7 +23897,7 @@
                 <a:ea typeface="Roboto"/>
                 <a:cs typeface="Roboto"/>
               </a:rPr>
-              <a:t>Нарушение SLA → снижение оплаты / расторжение.</a:t>
+              <a:t>Нарушение SLA → снижение оплаты.</a:t>
             </a:r>
           </a:p>
         </p:txBody>
@@ -23594,7 +23935,7 @@
           </a:bodyPr>
           <a:lstStyle xmlns:a="http://schemas.openxmlformats.org/drawingml/2006/main"/>
           <a:p xmlns:a="http://schemas.openxmlformats.org/drawingml/2006/main">
-            <a:pPr algn="l">
+            <a:pPr algn="l" marL="0" indent="0">
               <a:lnSpc>
                 <a:spcPct val="112000"/>
               </a:lnSpc>
@@ -23623,7 +23964,7 @@
                 <a:ea typeface="Roboto"/>
                 <a:cs typeface="Roboto"/>
               </a:rPr>
-              <a:t>П5 · Условия, сроки и санкции — предложения команды; договоры и финансирование ещё не подтверждены.</a:t>
+              <a:t>П5 · Условия, сроки и санкции фиксируются договором на этапе Т1.</a:t>
             </a:r>
           </a:p>
         </p:txBody>
@@ -23681,7 +24022,7 @@
           </a:bodyPr>
           <a:lstStyle xmlns:a="http://schemas.openxmlformats.org/drawingml/2006/main"/>
           <a:p xmlns:a="http://schemas.openxmlformats.org/drawingml/2006/main">
-            <a:pPr algn="r">
+            <a:pPr algn="r" marL="0" indent="0">
               <a:lnSpc>
                 <a:spcPct val="112000"/>
               </a:lnSpc>
@@ -23746,7 +24087,7 @@
           </a:bodyPr>
           <a:lstStyle xmlns:a="http://schemas.openxmlformats.org/drawingml/2006/main"/>
           <a:p xmlns:a="http://schemas.openxmlformats.org/drawingml/2006/main">
-            <a:pPr algn="l">
+            <a:pPr algn="l" marL="0" indent="0">
               <a:lnSpc>
                 <a:spcPct val="112000"/>
               </a:lnSpc>
@@ -23801,6 +24142,7 @@
           <a:bodyPr xmlns:a="http://schemas.openxmlformats.org/drawingml/2006/main"/>
           <a:lstStyle xmlns:a="http://schemas.openxmlformats.org/drawingml/2006/main"/>
           <a:p xmlns:a="http://schemas.openxmlformats.org/drawingml/2006/main">
+            <a:pPr marL="0" indent="0"/>
             <a:endParaRPr sz="1100"/>
           </a:p>
         </p:txBody>
@@ -23997,7 +24339,7 @@
             </a:lvl9pPr>
           </a:lstStyle>
           <a:p xmlns:a="http://schemas.openxmlformats.org/drawingml/2006/main">
-            <a:pPr algn="l">
+            <a:pPr algn="l" marL="0" indent="0">
               <a:lnSpc>
                 <a:spcPct val="112000"/>
               </a:lnSpc>
@@ -24026,44 +24368,11 @@
                 <a:ea typeface="Roboto"/>
                 <a:cs typeface="Roboto"/>
               </a:rPr>
-              <a:t>Официальный STRESS меняет</a:t>
-            </a:r>
-          </a:p>
-          <a:p xmlns:a="http://schemas.openxmlformats.org/drawingml/2006/main">
-            <a:pPr algn="l">
-              <a:lnSpc>
-                <a:spcPct val="112000"/>
-              </a:lnSpc>
-              <a:spcBef>
-                <a:spcPts val="0"/>
-              </a:spcBef>
-              <a:spcAft>
-                <a:spcPts val="0"/>
-              </a:spcAft>
-              <a:buNone/>
-              <a:defRPr sz="1725">
-                <a:solidFill>
-                  <a:srgbClr val="17212F"/>
-                </a:solidFill>
-                <a:latin typeface="Roboto"/>
-                <a:ea typeface="Roboto"/>
-                <a:cs typeface="Roboto"/>
-              </a:defRPr>
-            </a:pPr>
-            <a:r>
-              <a:rPr sz="1725">
-                <a:solidFill>
-                  <a:srgbClr val="17212F"/>
-                </a:solidFill>
-                <a:latin typeface="Roboto"/>
-                <a:ea typeface="Roboto"/>
-                <a:cs typeface="Roboto"/>
-              </a:rPr>
-              <a:t>только бюджетный лимит.</a:t>
-            </a:r>
-          </a:p>
-          <a:p xmlns:a="http://schemas.openxmlformats.org/drawingml/2006/main">
-            <a:pPr algn="l">
+              <a:t>STRESS меняет только лимит.</a:t>
+            </a:r>
+          </a:p>
+          <a:p xmlns:a="http://schemas.openxmlformats.org/drawingml/2006/main">
+            <a:pPr algn="l" marL="0" indent="0">
               <a:lnSpc>
                 <a:spcPct val="112000"/>
               </a:lnSpc>
@@ -24096,45 +24405,45 @@
             </a:r>
           </a:p>
           <a:p xmlns:a="http://schemas.openxmlformats.org/drawingml/2006/main">
-            <a:pPr algn="l">
+            <a:pPr algn="l" marL="0" indent="0">
               <a:lnSpc>
                 <a:spcPct val="112000"/>
               </a:lnSpc>
               <a:spcBef>
+                <a:spcPts val="0"/>
+              </a:spcBef>
+              <a:spcAft>
+                <a:spcPts val="0"/>
+              </a:spcAft>
+              <a:buNone/>
+              <a:defRPr sz="1725">
+                <a:solidFill>
+                  <a:srgbClr val="17212F"/>
+                </a:solidFill>
+                <a:latin typeface="Roboto"/>
+                <a:ea typeface="Roboto"/>
+                <a:cs typeface="Roboto"/>
+              </a:defRPr>
+            </a:pPr>
+            <a:r>
+              <a:rPr sz="1725">
+                <a:solidFill>
+                  <a:srgbClr val="17212F"/>
+                </a:solidFill>
+                <a:latin typeface="Roboto"/>
+                <a:ea typeface="Roboto"/>
+                <a:cs typeface="Roboto"/>
+              </a:rPr>
+              <a:t>Ниже: экономия D3</a:t>
+            </a:r>
+          </a:p>
+          <a:p xmlns:a="http://schemas.openxmlformats.org/drawingml/2006/main">
+            <a:pPr algn="l" marL="0" indent="0">
+              <a:lnSpc>
+                <a:spcPct val="112000"/>
+              </a:lnSpc>
+              <a:spcBef>
                 <a:spcPts val="800"/>
-              </a:spcBef>
-              <a:spcAft>
-                <a:spcPts val="0"/>
-              </a:spcAft>
-              <a:buNone/>
-              <a:defRPr sz="1725">
-                <a:solidFill>
-                  <a:srgbClr val="17212F"/>
-                </a:solidFill>
-                <a:latin typeface="Roboto"/>
-                <a:ea typeface="Roboto"/>
-                <a:cs typeface="Roboto"/>
-              </a:defRPr>
-            </a:pPr>
-            <a:r>
-              <a:rPr sz="1725">
-                <a:solidFill>
-                  <a:srgbClr val="17212F"/>
-                </a:solidFill>
-                <a:latin typeface="Roboto"/>
-                <a:ea typeface="Roboto"/>
-                <a:cs typeface="Roboto"/>
-              </a:rPr>
-              <a:t>Отдельно: экономия D3</a:t>
-            </a:r>
-          </a:p>
-          <a:p xmlns:a="http://schemas.openxmlformats.org/drawingml/2006/main">
-            <a:pPr algn="l">
-              <a:lnSpc>
-                <a:spcPct val="112000"/>
-              </a:lnSpc>
-              <a:spcBef>
-                <a:spcPts val="0"/>
               </a:spcBef>
               <a:spcAft>
                 <a:spcPts val="0"/>
@@ -24159,6 +24468,39 @@
                 <a:cs typeface="Roboto"/>
               </a:rPr>
               <a:t>при сохранённой координации</a:t>
+            </a:r>
+          </a:p>
+          <a:p xmlns:a="http://schemas.openxmlformats.org/drawingml/2006/main">
+            <a:pPr algn="l" marL="0" indent="0">
+              <a:lnSpc>
+                <a:spcPct val="112000"/>
+              </a:lnSpc>
+              <a:spcBef>
+                <a:spcPts val="0"/>
+              </a:spcBef>
+              <a:spcAft>
+                <a:spcPts val="0"/>
+              </a:spcAft>
+              <a:buNone/>
+              <a:defRPr sz="1725">
+                <a:solidFill>
+                  <a:srgbClr val="17212F"/>
+                </a:solidFill>
+                <a:latin typeface="Roboto"/>
+                <a:ea typeface="Roboto"/>
+                <a:cs typeface="Roboto"/>
+              </a:defRPr>
+            </a:pPr>
+            <a:r>
+              <a:rPr sz="1725">
+                <a:solidFill>
+                  <a:srgbClr val="17212F"/>
+                </a:solidFill>
+                <a:latin typeface="Roboto"/>
+                <a:ea typeface="Roboto"/>
+                <a:cs typeface="Roboto"/>
+              </a:rPr>
+              <a:t/>
             </a:r>
           </a:p>
         </p:txBody>
@@ -24355,7 +24697,7 @@
             </a:lvl9pPr>
           </a:lstStyle>
           <a:p xmlns:a="http://schemas.openxmlformats.org/drawingml/2006/main">
-            <a:pPr algn="l">
+            <a:pPr algn="l" marL="0" indent="0">
               <a:lnSpc>
                 <a:spcPct val="112000"/>
               </a:lnSpc>
@@ -24388,7 +24730,7 @@
             </a:r>
           </a:p>
           <a:p xmlns:a="http://schemas.openxmlformats.org/drawingml/2006/main">
-            <a:pPr algn="l">
+            <a:pPr algn="l" marL="0" indent="0">
               <a:lnSpc>
                 <a:spcPct val="112000"/>
               </a:lnSpc>
@@ -25695,7 +26037,18 @@
                           <a:ea typeface="Roboto"/>
                           <a:cs typeface="Roboto"/>
                         </a:rPr>
-                        <a:t>kcash</a:t>
+                        <a:t>k</a:t>
+                      </a:r>
+                      <a:r>
+                        <a:rPr sz="1425" b="0" baseline="-25000">
+                          <a:solidFill>
+                            <a:srgbClr val="17212F"/>
+                          </a:solidFill>
+                          <a:latin typeface="Roboto"/>
+                          <a:ea typeface="Roboto"/>
+                          <a:cs typeface="Roboto"/>
+                        </a:rPr>
+                        <a:t>cash</a:t>
                       </a:r>
                     </a:p>
                   </a:txBody>
@@ -25805,7 +26158,18 @@
                           <a:ea typeface="Roboto"/>
                           <a:cs typeface="Roboto"/>
                         </a:rPr>
-                        <a:t>t_rep</a:t>
+                        <a:t>t</a:t>
+                      </a:r>
+                      <a:r>
+                        <a:rPr sz="1425" b="0" baseline="-25000">
+                          <a:solidFill>
+                            <a:srgbClr val="17212F"/>
+                          </a:solidFill>
+                          <a:latin typeface="Roboto"/>
+                          <a:ea typeface="Roboto"/>
+                          <a:cs typeface="Roboto"/>
+                        </a:rPr>
+                        <a:t>rep</a:t>
                       </a:r>
                     </a:p>
                   </a:txBody>
@@ -25934,7 +26298,7 @@
           </a:bodyPr>
           <a:lstStyle xmlns:a="http://schemas.openxmlformats.org/drawingml/2006/main"/>
           <a:p xmlns:a="http://schemas.openxmlformats.org/drawingml/2006/main">
-            <a:pPr algn="l">
+            <a:pPr algn="l" marL="0" indent="0">
               <a:lnSpc>
                 <a:spcPct val="112000"/>
               </a:lnSpc>
@@ -26021,7 +26385,7 @@
           </a:bodyPr>
           <a:lstStyle xmlns:a="http://schemas.openxmlformats.org/drawingml/2006/main"/>
           <a:p xmlns:a="http://schemas.openxmlformats.org/drawingml/2006/main">
-            <a:pPr algn="r">
+            <a:pPr algn="r" marL="0" indent="0">
               <a:lnSpc>
                 <a:spcPct val="112000"/>
               </a:lnSpc>
@@ -26086,7 +26450,7 @@
           </a:bodyPr>
           <a:lstStyle xmlns:a="http://schemas.openxmlformats.org/drawingml/2006/main"/>
           <a:p xmlns:a="http://schemas.openxmlformats.org/drawingml/2006/main">
-            <a:pPr algn="l">
+            <a:pPr algn="l" marL="0" indent="0">
               <a:lnSpc>
                 <a:spcPct val="112000"/>
               </a:lnSpc>
@@ -26171,7 +26535,7 @@
           <a:bodyPr xmlns:a="http://schemas.openxmlformats.org/drawingml/2006/main" anchor="ctr"/>
           <a:lstStyle xmlns:a="http://schemas.openxmlformats.org/drawingml/2006/main"/>
           <a:p xmlns:a="http://schemas.openxmlformats.org/drawingml/2006/main">
-            <a:pPr algn="ctr">
+            <a:pPr algn="ctr" marL="0" indent="0">
               <a:buNone/>
             </a:pPr>
             <a:endParaRPr>
@@ -26233,7 +26597,7 @@
           <a:bodyPr xmlns:a="http://schemas.openxmlformats.org/drawingml/2006/main" anchor="ctr"/>
           <a:lstStyle xmlns:a="http://schemas.openxmlformats.org/drawingml/2006/main"/>
           <a:p xmlns:a="http://schemas.openxmlformats.org/drawingml/2006/main">
-            <a:pPr algn="ctr">
+            <a:pPr algn="ctr" marL="0" indent="0">
               <a:buNone/>
             </a:pPr>
             <a:endParaRPr>
@@ -26436,7 +26800,7 @@
             </a:lvl9pPr>
           </a:lstStyle>
           <a:p xmlns:a="http://schemas.openxmlformats.org/drawingml/2006/main">
-            <a:pPr algn="l">
+            <a:pPr algn="l" marL="0" indent="0">
               <a:lnSpc>
                 <a:spcPct val="112000"/>
               </a:lnSpc>
@@ -26469,7 +26833,7 @@
             </a:r>
           </a:p>
           <a:p xmlns:a="http://schemas.openxmlformats.org/drawingml/2006/main">
-            <a:pPr algn="l">
+            <a:pPr algn="l" marL="0" indent="0">
               <a:lnSpc>
                 <a:spcPct val="112000"/>
               </a:lnSpc>
@@ -26498,11 +26862,11 @@
                 <a:ea typeface="Roboto"/>
                 <a:cs typeface="Roboto"/>
               </a:rPr>
-              <a:t>При нулевой экономии: запас C0 38,2 млн.</a:t>
-            </a:r>
-          </a:p>
-          <a:p xmlns:a="http://schemas.openxmlformats.org/drawingml/2006/main">
-            <a:pPr algn="l">
+              <a:t>При нулевой экономии запас C0 — 38,2 млн.</a:t>
+            </a:r>
+          </a:p>
+          <a:p xmlns:a="http://schemas.openxmlformats.org/drawingml/2006/main">
+            <a:pPr algn="l" marL="0" indent="0">
               <a:lnSpc>
                 <a:spcPct val="112000"/>
               </a:lnSpc>
@@ -26531,7 +26895,7 @@
                 <a:ea typeface="Roboto"/>
                 <a:cs typeface="Roboto"/>
               </a:rPr>
-              <a:t>Проверка не гарантирует будущую скидку.</a:t>
+              <a:t/>
             </a:r>
           </a:p>
         </p:txBody>
@@ -26587,7 +26951,7 @@
           <a:bodyPr xmlns:a="http://schemas.openxmlformats.org/drawingml/2006/main" anchor="ctr"/>
           <a:lstStyle xmlns:a="http://schemas.openxmlformats.org/drawingml/2006/main"/>
           <a:p xmlns:a="http://schemas.openxmlformats.org/drawingml/2006/main">
-            <a:pPr algn="ctr">
+            <a:pPr algn="ctr" marL="0" indent="0">
               <a:buNone/>
             </a:pPr>
             <a:endParaRPr>
@@ -26649,7 +27013,7 @@
           <a:bodyPr xmlns:a="http://schemas.openxmlformats.org/drawingml/2006/main" anchor="ctr"/>
           <a:lstStyle xmlns:a="http://schemas.openxmlformats.org/drawingml/2006/main"/>
           <a:p xmlns:a="http://schemas.openxmlformats.org/drawingml/2006/main">
-            <a:pPr algn="ctr">
+            <a:pPr algn="ctr" marL="0" indent="0">
               <a:buNone/>
             </a:pPr>
             <a:endParaRPr>
@@ -26681,6 +27045,7 @@
           <a:bodyPr xmlns:a="http://schemas.openxmlformats.org/drawingml/2006/main"/>
           <a:lstStyle xmlns:a="http://schemas.openxmlformats.org/drawingml/2006/main"/>
           <a:p xmlns:a="http://schemas.openxmlformats.org/drawingml/2006/main">
+            <a:pPr marL="0" indent="0"/>
             <a:endParaRPr sz="1100"/>
           </a:p>
         </p:txBody>
@@ -26877,7 +27242,7 @@
             </a:lvl9pPr>
           </a:lstStyle>
           <a:p xmlns:a="http://schemas.openxmlformats.org/drawingml/2006/main">
-            <a:pPr algn="l">
+            <a:pPr algn="l" marL="0" indent="0">
               <a:lnSpc>
                 <a:spcPct val="112000"/>
               </a:lnSpc>
@@ -26906,11 +27271,11 @@
                 <a:ea typeface="Roboto"/>
                 <a:cs typeface="Roboto"/>
               </a:rPr>
-              <a:t>При падении всей коммерческой выручки на 41,6% исчезает операционный профицит.</a:t>
-            </a:r>
-          </a:p>
-          <a:p xmlns:a="http://schemas.openxmlformats.org/drawingml/2006/main">
-            <a:pPr algn="l">
+              <a:t>Падение коммерческой выручки на 41,6% убирает профицит.</a:t>
+            </a:r>
+          </a:p>
+          <a:p xmlns:a="http://schemas.openxmlformats.org/drawingml/2006/main">
+            <a:pPr algn="l" marL="0" indent="0">
               <a:lnSpc>
                 <a:spcPct val="112000"/>
               </a:lnSpc>
@@ -26939,7 +27304,40 @@
                 <a:ea typeface="Roboto"/>
                 <a:cs typeface="Roboto"/>
               </a:rPr>
-              <a:t>Порог 92,9% относится только к формальному kcash ≥ 0,6; якорные платежи и OPEX фиксированы.</a:t>
+              <a:t>До порога kcash ≥ 0,6 — запас 92,9%.</a:t>
+            </a:r>
+            <a:r>
+              <a:rPr sz="1575">
+                <a:solidFill>
+                  <a:srgbClr val="17212F"/>
+                </a:solidFill>
+                <a:latin typeface="Roboto"/>
+                <a:ea typeface="Roboto"/>
+                <a:cs typeface="Roboto"/>
+              </a:rPr>
+              <a:t/>
+            </a:r>
+            <a:r>
+              <a:rPr sz="1575" baseline="-25000">
+                <a:solidFill>
+                  <a:srgbClr val="17212F"/>
+                </a:solidFill>
+                <a:latin typeface="Roboto"/>
+                <a:ea typeface="Roboto"/>
+                <a:cs typeface="Roboto"/>
+              </a:rPr>
+              <a:t/>
+            </a:r>
+            <a:r>
+              <a:rPr sz="1575">
+                <a:solidFill>
+                  <a:srgbClr val="17212F"/>
+                </a:solidFill>
+                <a:latin typeface="Roboto"/>
+                <a:ea typeface="Roboto"/>
+                <a:cs typeface="Roboto"/>
+              </a:rPr>
+              <a:t/>
             </a:r>
           </a:p>
         </p:txBody>
@@ -27136,7 +27534,7 @@
             </a:lvl9pPr>
           </a:lstStyle>
           <a:p xmlns:a="http://schemas.openxmlformats.org/drawingml/2006/main">
-            <a:pPr algn="l">
+            <a:pPr algn="l" marL="0" indent="0">
               <a:lnSpc>
                 <a:spcPct val="112000"/>
               </a:lnSpc>
@@ -27200,7 +27598,7 @@
           </a:bodyPr>
           <a:lstStyle xmlns:a="http://schemas.openxmlformats.org/drawingml/2006/main"/>
           <a:p xmlns:a="http://schemas.openxmlformats.org/drawingml/2006/main">
-            <a:pPr algn="l">
+            <a:pPr algn="l" marL="0" indent="0">
               <a:lnSpc>
                 <a:spcPct val="112000"/>
               </a:lnSpc>
@@ -27426,7 +27824,7 @@
             </a:lvl9pPr>
           </a:lstStyle>
           <a:p xmlns:a="http://schemas.openxmlformats.org/drawingml/2006/main">
-            <a:pPr algn="l">
+            <a:pPr algn="l" marL="0" indent="0">
               <a:lnSpc>
                 <a:spcPct val="112000"/>
               </a:lnSpc>
@@ -27459,7 +27857,7 @@
             </a:r>
           </a:p>
           <a:p xmlns:a="http://schemas.openxmlformats.org/drawingml/2006/main">
-            <a:pPr algn="l">
+            <a:pPr algn="l" marL="0" indent="0">
               <a:lnSpc>
                 <a:spcPct val="112000"/>
               </a:lnSpc>
@@ -27492,7 +27890,7 @@
             </a:r>
           </a:p>
           <a:p xmlns:a="http://schemas.openxmlformats.org/drawingml/2006/main">
-            <a:pPr algn="l">
+            <a:pPr algn="l" marL="0" indent="0">
               <a:lnSpc>
                 <a:spcPct val="112000"/>
               </a:lnSpc>
@@ -27556,7 +27954,7 @@
           </a:bodyPr>
           <a:lstStyle xmlns:a="http://schemas.openxmlformats.org/drawingml/2006/main"/>
           <a:p xmlns:a="http://schemas.openxmlformats.org/drawingml/2006/main">
-            <a:pPr algn="l">
+            <a:pPr algn="l" marL="0" indent="0">
               <a:lnSpc>
                 <a:spcPct val="112000"/>
               </a:lnSpc>
@@ -27782,7 +28180,7 @@
             </a:lvl9pPr>
           </a:lstStyle>
           <a:p xmlns:a="http://schemas.openxmlformats.org/drawingml/2006/main">
-            <a:pPr algn="l">
+            <a:pPr algn="l" marL="0" indent="0">
               <a:lnSpc>
                 <a:spcPct val="112000"/>
               </a:lnSpc>
@@ -27811,11 +28209,44 @@
                 <a:ea typeface="Roboto"/>
                 <a:cs typeface="Roboto"/>
               </a:rPr>
-              <a:t>Пилотные контракты; контроль CRM и kcash.</a:t>
-            </a:r>
-          </a:p>
-          <a:p xmlns:a="http://schemas.openxmlformats.org/drawingml/2006/main">
-            <a:pPr algn="l">
+              <a:t>Пилотные контракты; контроль CRM и </a:t>
+            </a:r>
+            <a:r>
+              <a:rPr sz="1500">
+                <a:solidFill>
+                  <a:srgbClr val="17212F"/>
+                </a:solidFill>
+                <a:latin typeface="Roboto"/>
+                <a:ea typeface="Roboto"/>
+                <a:cs typeface="Roboto"/>
+              </a:rPr>
+              <a:t>k</a:t>
+            </a:r>
+            <a:r>
+              <a:rPr sz="1500" baseline="-25000">
+                <a:solidFill>
+                  <a:srgbClr val="17212F"/>
+                </a:solidFill>
+                <a:latin typeface="Roboto"/>
+                <a:ea typeface="Roboto"/>
+                <a:cs typeface="Roboto"/>
+              </a:rPr>
+              <a:t>cash</a:t>
+            </a:r>
+            <a:r>
+              <a:rPr sz="1500">
+                <a:solidFill>
+                  <a:srgbClr val="17212F"/>
+                </a:solidFill>
+                <a:latin typeface="Roboto"/>
+                <a:ea typeface="Roboto"/>
+                <a:cs typeface="Roboto"/>
+              </a:rPr>
+              <a:t>.</a:t>
+            </a:r>
+          </a:p>
+          <a:p xmlns:a="http://schemas.openxmlformats.org/drawingml/2006/main">
+            <a:pPr algn="l" marL="0" indent="0">
               <a:lnSpc>
                 <a:spcPct val="112000"/>
               </a:lnSpc>
@@ -27844,11 +28275,44 @@
                 <a:ea typeface="Roboto"/>
                 <a:cs typeface="Roboto"/>
               </a:rPr>
-              <a:t>Пилот не гарантирует весь объём спроса.</a:t>
-            </a:r>
-          </a:p>
-          <a:p xmlns:a="http://schemas.openxmlformats.org/drawingml/2006/main">
-            <a:pPr algn="l">
+              <a:t>При нулевой commercial: </a:t>
+            </a:r>
+            <a:r>
+              <a:rPr sz="1500">
+                <a:solidFill>
+                  <a:srgbClr val="17212F"/>
+                </a:solidFill>
+                <a:latin typeface="Roboto"/>
+                <a:ea typeface="Roboto"/>
+                <a:cs typeface="Roboto"/>
+              </a:rPr>
+              <a:t>k</a:t>
+            </a:r>
+            <a:r>
+              <a:rPr sz="1500" baseline="-25000">
+                <a:solidFill>
+                  <a:srgbClr val="17212F"/>
+                </a:solidFill>
+                <a:latin typeface="Roboto"/>
+                <a:ea typeface="Roboto"/>
+                <a:cs typeface="Roboto"/>
+              </a:rPr>
+              <a:t>cash</a:t>
+            </a:r>
+            <a:r>
+              <a:rPr sz="1500">
+                <a:solidFill>
+                  <a:srgbClr val="17212F"/>
+                </a:solidFill>
+                <a:latin typeface="Roboto"/>
+                <a:ea typeface="Roboto"/>
+                <a:cs typeface="Roboto"/>
+              </a:rPr>
+              <a:t> 0,545, FAIL.</a:t>
+            </a:r>
+          </a:p>
+          <a:p xmlns:a="http://schemas.openxmlformats.org/drawingml/2006/main">
+            <a:pPr algn="l" marL="0" indent="0">
               <a:lnSpc>
                 <a:spcPct val="112000"/>
               </a:lnSpc>
@@ -27877,7 +28341,7 @@
                 <a:ea typeface="Roboto"/>
                 <a:cs typeface="Roboto"/>
               </a:rPr>
-              <a:t>При нулевой commercial: kcash 0,545, FAIL.</a:t>
+              <a:t/>
             </a:r>
           </a:p>
         </p:txBody>
@@ -27912,7 +28376,7 @@
           </a:bodyPr>
           <a:lstStyle xmlns:a="http://schemas.openxmlformats.org/drawingml/2006/main"/>
           <a:p xmlns:a="http://schemas.openxmlformats.org/drawingml/2006/main">
-            <a:pPr algn="l">
+            <a:pPr algn="l" marL="0" indent="0">
               <a:lnSpc>
                 <a:spcPct val="112000"/>
               </a:lnSpc>
@@ -28138,7 +28602,7 @@
             </a:lvl9pPr>
           </a:lstStyle>
           <a:p xmlns:a="http://schemas.openxmlformats.org/drawingml/2006/main">
-            <a:pPr algn="l">
+            <a:pPr algn="l" marL="0" indent="0">
               <a:lnSpc>
                 <a:spcPct val="112000"/>
               </a:lnSpc>
@@ -28171,40 +28635,7 @@
             </a:r>
           </a:p>
           <a:p xmlns:a="http://schemas.openxmlformats.org/drawingml/2006/main">
-            <a:pPr algn="l">
-              <a:lnSpc>
-                <a:spcPct val="112000"/>
-              </a:lnSpc>
-              <a:spcBef>
-                <a:spcPts val="0"/>
-              </a:spcBef>
-              <a:spcAft>
-                <a:spcPts val="0"/>
-              </a:spcAft>
-              <a:buNone/>
-              <a:defRPr sz="1500">
-                <a:solidFill>
-                  <a:srgbClr val="17212F"/>
-                </a:solidFill>
-                <a:latin typeface="Roboto"/>
-                <a:ea typeface="Roboto"/>
-                <a:cs typeface="Roboto"/>
-              </a:defRPr>
-            </a:pPr>
-            <a:r>
-              <a:rPr sz="1500">
-                <a:solidFill>
-                  <a:srgbClr val="17212F"/>
-                </a:solidFill>
-                <a:latin typeface="Roboto"/>
-                <a:ea typeface="Roboto"/>
-                <a:cs typeface="Roboto"/>
-              </a:rPr>
-              <a:t>Резерв не включён как бесплатная мера.</a:t>
-            </a:r>
-          </a:p>
-          <a:p xmlns:a="http://schemas.openxmlformats.org/drawingml/2006/main">
-            <a:pPr algn="l">
+            <a:pPr algn="l" marL="0" indent="0">
               <a:lnSpc>
                 <a:spcPct val="112000"/>
               </a:lnSpc>
@@ -28234,6 +28665,39 @@
                 <a:cs typeface="Roboto"/>
               </a:rPr>
               <a:t>Порог resilience в кейсе не задан.</a:t>
+            </a:r>
+          </a:p>
+          <a:p xmlns:a="http://schemas.openxmlformats.org/drawingml/2006/main">
+            <a:pPr algn="l" marL="0" indent="0">
+              <a:lnSpc>
+                <a:spcPct val="112000"/>
+              </a:lnSpc>
+              <a:spcBef>
+                <a:spcPts val="0"/>
+              </a:spcBef>
+              <a:spcAft>
+                <a:spcPts val="0"/>
+              </a:spcAft>
+              <a:buNone/>
+              <a:defRPr sz="1500">
+                <a:solidFill>
+                  <a:srgbClr val="17212F"/>
+                </a:solidFill>
+                <a:latin typeface="Roboto"/>
+                <a:ea typeface="Roboto"/>
+                <a:cs typeface="Roboto"/>
+              </a:defRPr>
+            </a:pPr>
+            <a:r>
+              <a:rPr sz="1500">
+                <a:solidFill>
+                  <a:srgbClr val="17212F"/>
+                </a:solidFill>
+                <a:latin typeface="Roboto"/>
+                <a:ea typeface="Roboto"/>
+                <a:cs typeface="Roboto"/>
+              </a:rPr>
+              <a:t/>
             </a:r>
           </a:p>
         </p:txBody>
@@ -28268,7 +28732,7 @@
           </a:bodyPr>
           <a:lstStyle xmlns:a="http://schemas.openxmlformats.org/drawingml/2006/main"/>
           <a:p xmlns:a="http://schemas.openxmlformats.org/drawingml/2006/main">
-            <a:pPr algn="l">
+            <a:pPr algn="l" marL="0" indent="0">
               <a:lnSpc>
                 <a:spcPct val="112000"/>
               </a:lnSpc>
@@ -28335,7 +28799,7 @@
           </a:bodyPr>
           <a:lstStyle xmlns:a="http://schemas.openxmlformats.org/drawingml/2006/main"/>
           <a:p xmlns:a="http://schemas.openxmlformats.org/drawingml/2006/main">
-            <a:pPr algn="l">
+            <a:pPr algn="l" marL="0" indent="0">
               <a:lnSpc>
                 <a:spcPct val="112000"/>
               </a:lnSpc>
